--- a/Lecture_notes/week 2/Lecture2_Tashkil_Etuvchilari.pptx
+++ b/Lecture_notes/week 2/Lecture2_Tashkil_Etuvchilari.pptx
@@ -9412,13 +9412,13 @@
           <a:bodyPr wrap="square" lIns="274320" tIns="411480" rIns="182880" rtlCol="0" anchor="ctr"/>
           <a:lstStyle/>
           <a:p>
-            <a:pPr algn="ctr">
+            <a:pPr>
               <a:lnSpc>
                 <a:spcPct val="122000"/>
               </a:lnSpc>
             </a:pPr>
             <a:r>
-              <a:rPr sz="1600">
+              <a:rPr sz="1600" dirty="0">
                 <a:solidFill>
                   <a:srgbClr val="569CD6"/>
                 </a:solidFill>
@@ -9427,16 +9427,34 @@
               <a:t>int</a:t>
             </a:r>
             <a:r>
-              <a:rPr sz="1600">
+              <a:rPr sz="1600" dirty="0">
                 <a:solidFill>
                   <a:srgbClr val="D4D4D4"/>
                 </a:solidFill>
                 <a:latin typeface="Consolas"/>
               </a:rPr>
-              <a:t> yosh = </a:t>
-            </a:r>
-            <a:r>
-              <a:rPr sz="1600">
+              <a:t> </a:t>
+            </a:r>
+            <a:r>
+              <a:rPr sz="1600" dirty="0" err="1">
+                <a:solidFill>
+                  <a:srgbClr val="D4D4D4"/>
+                </a:solidFill>
+                <a:latin typeface="Consolas"/>
+              </a:rPr>
+              <a:t>yosh</a:t>
+            </a:r>
+            <a:r>
+              <a:rPr sz="1600" dirty="0">
+                <a:solidFill>
+                  <a:srgbClr val="D4D4D4"/>
+                </a:solidFill>
+                <a:latin typeface="Consolas"/>
+              </a:rPr>
+              <a:t> = </a:t>
+            </a:r>
+            <a:r>
+              <a:rPr sz="1600" dirty="0">
                 <a:solidFill>
                   <a:srgbClr val="CE9178"/>
                 </a:solidFill>
@@ -9445,7 +9463,7 @@
               <a:t>20</a:t>
             </a:r>
             <a:r>
-              <a:rPr sz="1600">
+              <a:rPr sz="1600" dirty="0">
                 <a:solidFill>
                   <a:srgbClr val="D4D4D4"/>
                 </a:solidFill>
@@ -9461,7 +9479,7 @@
               </a:lnSpc>
             </a:pPr>
             <a:r>
-              <a:rPr sz="1600">
+              <a:rPr sz="1600" dirty="0">
                 <a:solidFill>
                   <a:srgbClr val="569CD6"/>
                 </a:solidFill>
@@ -9470,7 +9488,7 @@
               <a:t>string</a:t>
             </a:r>
             <a:r>
-              <a:rPr sz="1600">
+              <a:rPr sz="1600" dirty="0">
                 <a:solidFill>
                   <a:srgbClr val="D4D4D4"/>
                 </a:solidFill>
@@ -9479,7 +9497,7 @@
               <a:t> ism = </a:t>
             </a:r>
             <a:r>
-              <a:rPr sz="1600">
+              <a:rPr sz="1600" dirty="0">
                 <a:solidFill>
                   <a:srgbClr val="CE9178"/>
                 </a:solidFill>
@@ -9488,7 +9506,7 @@
               <a:t>"Aziza"</a:t>
             </a:r>
             <a:r>
-              <a:rPr sz="1600">
+              <a:rPr sz="1600" dirty="0">
                 <a:solidFill>
                   <a:srgbClr val="D4D4D4"/>
                 </a:solidFill>
@@ -9504,7 +9522,7 @@
               </a:lnSpc>
             </a:pPr>
             <a:r>
-              <a:rPr sz="1600">
+              <a:rPr sz="1600" dirty="0" err="1">
                 <a:solidFill>
                   <a:srgbClr val="4EC9B0"/>
                 </a:solidFill>
@@ -9513,7 +9531,7 @@
               <a:t>Console</a:t>
             </a:r>
             <a:r>
-              <a:rPr sz="1600">
+              <a:rPr sz="1600" dirty="0" err="1">
                 <a:solidFill>
                   <a:srgbClr val="D4D4D4"/>
                 </a:solidFill>
@@ -9522,7 +9540,7 @@
               <a:t>.</a:t>
             </a:r>
             <a:r>
-              <a:rPr sz="1600">
+              <a:rPr sz="1600" dirty="0" err="1">
                 <a:solidFill>
                   <a:srgbClr val="DCDCAA"/>
                 </a:solidFill>
@@ -9531,7 +9549,7 @@
               <a:t>WriteLine</a:t>
             </a:r>
             <a:r>
-              <a:rPr sz="1600">
+              <a:rPr sz="1600" dirty="0">
                 <a:solidFill>
                   <a:srgbClr val="D4D4D4"/>
                 </a:solidFill>
@@ -9540,22 +9558,58 @@
               <a:t>(ism + </a:t>
             </a:r>
             <a:r>
-              <a:rPr sz="1600">
+              <a:rPr sz="1600" dirty="0">
                 <a:solidFill>
                   <a:srgbClr val="CE9178"/>
                 </a:solidFill>
                 <a:latin typeface="Consolas"/>
               </a:rPr>
-              <a:t>" yosh: "</a:t>
-            </a:r>
-            <a:r>
-              <a:rPr sz="1600">
+              <a:t>" </a:t>
+            </a:r>
+            <a:r>
+              <a:rPr sz="1600" dirty="0" err="1">
+                <a:solidFill>
+                  <a:srgbClr val="CE9178"/>
+                </a:solidFill>
+                <a:latin typeface="Consolas"/>
+              </a:rPr>
+              <a:t>yosh</a:t>
+            </a:r>
+            <a:r>
+              <a:rPr sz="1600" dirty="0">
+                <a:solidFill>
+                  <a:srgbClr val="CE9178"/>
+                </a:solidFill>
+                <a:latin typeface="Consolas"/>
+              </a:rPr>
+              <a:t>: "</a:t>
+            </a:r>
+            <a:r>
+              <a:rPr sz="1600" dirty="0">
                 <a:solidFill>
                   <a:srgbClr val="D4D4D4"/>
                 </a:solidFill>
                 <a:latin typeface="Consolas"/>
               </a:rPr>
-              <a:t> + yosh);</a:t>
+              <a:t> + </a:t>
+            </a:r>
+            <a:r>
+              <a:rPr sz="1600" dirty="0" err="1">
+                <a:solidFill>
+                  <a:srgbClr val="D4D4D4"/>
+                </a:solidFill>
+                <a:latin typeface="Consolas"/>
+              </a:rPr>
+              <a:t>yosh</a:t>
+            </a:r>
+            <a:r>
+              <a:rPr sz="1600" dirty="0">
+                <a:solidFill>
+                  <a:srgbClr val="D4D4D4"/>
+                </a:solidFill>
+                <a:latin typeface="Consolas"/>
+              </a:rPr>
+              <a:t>);</a:t>
             </a:r>
           </a:p>
           <a:p>
@@ -9565,16 +9619,25 @@
               </a:lnSpc>
             </a:pPr>
             <a:r>
-              <a:rPr sz="1600">
+              <a:rPr sz="1600" dirty="0" err="1">
                 <a:solidFill>
                   <a:srgbClr val="D4D4D4"/>
                 </a:solidFill>
                 <a:latin typeface="Consolas"/>
               </a:rPr>
-              <a:t>yosh = </a:t>
-            </a:r>
-            <a:r>
-              <a:rPr sz="1600">
+              <a:t>yosh</a:t>
+            </a:r>
+            <a:r>
+              <a:rPr sz="1600" dirty="0">
+                <a:solidFill>
+                  <a:srgbClr val="D4D4D4"/>
+                </a:solidFill>
+                <a:latin typeface="Consolas"/>
+              </a:rPr>
+              <a:t> = </a:t>
+            </a:r>
+            <a:r>
+              <a:rPr sz="1600" dirty="0">
                 <a:solidFill>
                   <a:srgbClr val="CE9178"/>
                 </a:solidFill>
@@ -9583,7 +9646,7 @@
               <a:t>21</a:t>
             </a:r>
             <a:r>
-              <a:rPr sz="1600">
+              <a:rPr sz="1600" dirty="0">
                 <a:solidFill>
                   <a:srgbClr val="D4D4D4"/>
                 </a:solidFill>
@@ -9592,14 +9655,47 @@
               <a:t>;  </a:t>
             </a:r>
             <a:r>
-              <a:rPr sz="1600">
+              <a:rPr sz="1600" dirty="0">
                 <a:solidFill>
                   <a:srgbClr val="6A9955"/>
                 </a:solidFill>
                 <a:latin typeface="Consolas"/>
               </a:rPr>
-              <a:t>// qiymat yangilandi</a:t>
-            </a:r>
+              <a:t>// </a:t>
+            </a:r>
+            <a:r>
+              <a:rPr sz="1600" dirty="0" err="1">
+                <a:solidFill>
+                  <a:srgbClr val="6A9955"/>
+                </a:solidFill>
+                <a:latin typeface="Consolas"/>
+              </a:rPr>
+              <a:t>qiymat</a:t>
+            </a:r>
+            <a:r>
+              <a:rPr sz="1600" dirty="0">
+                <a:solidFill>
+                  <a:srgbClr val="6A9955"/>
+                </a:solidFill>
+                <a:latin typeface="Consolas"/>
+              </a:rPr>
+              <a:t> </a:t>
+            </a:r>
+            <a:r>
+              <a:rPr sz="1600" dirty="0" err="1">
+                <a:solidFill>
+                  <a:srgbClr val="6A9955"/>
+                </a:solidFill>
+                <a:latin typeface="Consolas"/>
+              </a:rPr>
+              <a:t>yangilandi</a:t>
+            </a:r>
+            <a:endParaRPr sz="1600" dirty="0">
+              <a:solidFill>
+                <a:srgbClr val="6A9955"/>
+              </a:solidFill>
+              <a:latin typeface="Consolas"/>
+            </a:endParaRPr>
           </a:p>
           <a:p>
             <a:pPr>
@@ -9608,7 +9704,7 @@
               </a:lnSpc>
             </a:pPr>
             <a:r>
-              <a:rPr sz="1600">
+              <a:rPr sz="1600" dirty="0" err="1">
                 <a:solidFill>
                   <a:srgbClr val="4EC9B0"/>
                 </a:solidFill>
@@ -9617,7 +9713,7 @@
               <a:t>Console</a:t>
             </a:r>
             <a:r>
-              <a:rPr sz="1600">
+              <a:rPr sz="1600" dirty="0" err="1">
                 <a:solidFill>
                   <a:srgbClr val="D4D4D4"/>
                 </a:solidFill>
@@ -9626,7 +9722,7 @@
               <a:t>.</a:t>
             </a:r>
             <a:r>
-              <a:rPr sz="1600">
+              <a:rPr sz="1600" dirty="0" err="1">
                 <a:solidFill>
                   <a:srgbClr val="DCDCAA"/>
                 </a:solidFill>
@@ -9635,13 +9731,31 @@
               <a:t>WriteLine</a:t>
             </a:r>
             <a:r>
-              <a:rPr sz="1600">
+              <a:rPr sz="1600" dirty="0">
                 <a:solidFill>
                   <a:srgbClr val="D4D4D4"/>
                 </a:solidFill>
                 <a:latin typeface="Consolas"/>
               </a:rPr>
-              <a:t>(yosh);</a:t>
+              <a:t>(</a:t>
+            </a:r>
+            <a:r>
+              <a:rPr sz="1600" dirty="0" err="1">
+                <a:solidFill>
+                  <a:srgbClr val="D4D4D4"/>
+                </a:solidFill>
+                <a:latin typeface="Consolas"/>
+              </a:rPr>
+              <a:t>yosh</a:t>
+            </a:r>
+            <a:r>
+              <a:rPr sz="1600" dirty="0">
+                <a:solidFill>
+                  <a:srgbClr val="D4D4D4"/>
+                </a:solidFill>
+                <a:latin typeface="Consolas"/>
+              </a:rPr>
+              <a:t>);</a:t>
             </a:r>
           </a:p>
         </p:txBody>
@@ -11125,13 +11239,13 @@
           <a:bodyPr wrap="square" lIns="274320" tIns="411480" rIns="182880" rtlCol="0" anchor="ctr"/>
           <a:lstStyle/>
           <a:p>
-            <a:pPr algn="ctr">
+            <a:pPr>
               <a:lnSpc>
                 <a:spcPct val="122000"/>
               </a:lnSpc>
             </a:pPr>
             <a:r>
-              <a:rPr sz="1600">
+              <a:rPr sz="1600" dirty="0">
                 <a:solidFill>
                   <a:srgbClr val="569CD6"/>
                 </a:solidFill>
@@ -11140,7 +11254,7 @@
               <a:t>const double</a:t>
             </a:r>
             <a:r>
-              <a:rPr sz="1600">
+              <a:rPr sz="1600" dirty="0">
                 <a:solidFill>
                   <a:srgbClr val="D4D4D4"/>
                 </a:solidFill>
@@ -11149,7 +11263,7 @@
               <a:t> PI = </a:t>
             </a:r>
             <a:r>
-              <a:rPr sz="1600">
+              <a:rPr sz="1600" dirty="0">
                 <a:solidFill>
                   <a:srgbClr val="CE9178"/>
                 </a:solidFill>
@@ -11158,7 +11272,7 @@
               <a:t>3.14159</a:t>
             </a:r>
             <a:r>
-              <a:rPr sz="1600">
+              <a:rPr sz="1600" dirty="0">
                 <a:solidFill>
                   <a:srgbClr val="D4D4D4"/>
                 </a:solidFill>
@@ -11174,7 +11288,7 @@
               </a:lnSpc>
             </a:pPr>
             <a:r>
-              <a:rPr sz="1600">
+              <a:rPr sz="1600" dirty="0">
                 <a:solidFill>
                   <a:srgbClr val="569CD6"/>
                 </a:solidFill>
@@ -11183,7 +11297,7 @@
               <a:t>double</a:t>
             </a:r>
             <a:r>
-              <a:rPr sz="1600">
+              <a:rPr sz="1600" dirty="0">
                 <a:solidFill>
                   <a:srgbClr val="D4D4D4"/>
                 </a:solidFill>
@@ -11192,7 +11306,7 @@
               <a:t> radius = </a:t>
             </a:r>
             <a:r>
-              <a:rPr sz="1600">
+              <a:rPr sz="1600" dirty="0">
                 <a:solidFill>
                   <a:srgbClr val="CE9178"/>
                 </a:solidFill>
@@ -11201,7 +11315,7 @@
               <a:t>5</a:t>
             </a:r>
             <a:r>
-              <a:rPr sz="1600">
+              <a:rPr sz="1600" dirty="0">
                 <a:solidFill>
                   <a:srgbClr val="D4D4D4"/>
                 </a:solidFill>
@@ -11217,7 +11331,7 @@
               </a:lnSpc>
             </a:pPr>
             <a:r>
-              <a:rPr sz="1600">
+              <a:rPr sz="1600" dirty="0">
                 <a:solidFill>
                   <a:srgbClr val="569CD6"/>
                 </a:solidFill>
@@ -11226,13 +11340,31 @@
               <a:t>double</a:t>
             </a:r>
             <a:r>
-              <a:rPr sz="1600">
+              <a:rPr sz="1600" dirty="0">
                 <a:solidFill>
                   <a:srgbClr val="D4D4D4"/>
                 </a:solidFill>
                 <a:latin typeface="Consolas"/>
               </a:rPr>
-              <a:t> yuza = PI * radius * radius;</a:t>
+              <a:t> </a:t>
+            </a:r>
+            <a:r>
+              <a:rPr sz="1600" dirty="0" err="1">
+                <a:solidFill>
+                  <a:srgbClr val="D4D4D4"/>
+                </a:solidFill>
+                <a:latin typeface="Consolas"/>
+              </a:rPr>
+              <a:t>yuza</a:t>
+            </a:r>
+            <a:r>
+              <a:rPr sz="1600" dirty="0">
+                <a:solidFill>
+                  <a:srgbClr val="D4D4D4"/>
+                </a:solidFill>
+                <a:latin typeface="Consolas"/>
+              </a:rPr>
+              <a:t> = PI * radius * radius;</a:t>
             </a:r>
           </a:p>
           <a:p>
@@ -11242,7 +11374,7 @@
               </a:lnSpc>
             </a:pPr>
             <a:r>
-              <a:rPr sz="1600">
+              <a:rPr sz="1600" dirty="0" err="1">
                 <a:solidFill>
                   <a:srgbClr val="4EC9B0"/>
                 </a:solidFill>
@@ -11251,7 +11383,7 @@
               <a:t>Console</a:t>
             </a:r>
             <a:r>
-              <a:rPr sz="1600">
+              <a:rPr sz="1600" dirty="0" err="1">
                 <a:solidFill>
                   <a:srgbClr val="D4D4D4"/>
                 </a:solidFill>
@@ -11260,7 +11392,7 @@
               <a:t>.</a:t>
             </a:r>
             <a:r>
-              <a:rPr sz="1600">
+              <a:rPr sz="1600" dirty="0" err="1">
                 <a:solidFill>
                   <a:srgbClr val="DCDCAA"/>
                 </a:solidFill>
@@ -11269,13 +11401,31 @@
               <a:t>WriteLine</a:t>
             </a:r>
             <a:r>
-              <a:rPr sz="1600">
+              <a:rPr sz="1600" dirty="0">
                 <a:solidFill>
                   <a:srgbClr val="D4D4D4"/>
                 </a:solidFill>
                 <a:latin typeface="Consolas"/>
               </a:rPr>
-              <a:t>(yuza);</a:t>
+              <a:t>(</a:t>
+            </a:r>
+            <a:r>
+              <a:rPr sz="1600" dirty="0" err="1">
+                <a:solidFill>
+                  <a:srgbClr val="D4D4D4"/>
+                </a:solidFill>
+                <a:latin typeface="Consolas"/>
+              </a:rPr>
+              <a:t>yuza</a:t>
+            </a:r>
+            <a:r>
+              <a:rPr sz="1600" dirty="0">
+                <a:solidFill>
+                  <a:srgbClr val="D4D4D4"/>
+                </a:solidFill>
+                <a:latin typeface="Consolas"/>
+              </a:rPr>
+              <a:t>);</a:t>
             </a:r>
           </a:p>
           <a:p>
@@ -11285,7 +11435,7 @@
               </a:lnSpc>
             </a:pPr>
             <a:r>
-              <a:rPr sz="1600">
+              <a:rPr sz="1600" dirty="0">
                 <a:solidFill>
                   <a:srgbClr val="D4D4D4"/>
                 </a:solidFill>
@@ -11294,7 +11444,7 @@
               <a:t>PI = </a:t>
             </a:r>
             <a:r>
-              <a:rPr sz="1600">
+              <a:rPr sz="1600" dirty="0">
                 <a:solidFill>
                   <a:srgbClr val="CE9178"/>
                 </a:solidFill>
@@ -11303,7 +11453,7 @@
               <a:t>3.14</a:t>
             </a:r>
             <a:r>
-              <a:rPr sz="1600">
+              <a:rPr sz="1600" dirty="0">
                 <a:solidFill>
                   <a:srgbClr val="D4D4D4"/>
                 </a:solidFill>
@@ -11312,14 +11462,65 @@
               <a:t>; </a:t>
             </a:r>
             <a:r>
-              <a:rPr sz="1600">
+              <a:rPr sz="1600" dirty="0">
                 <a:solidFill>
                   <a:srgbClr val="6A9955"/>
                 </a:solidFill>
                 <a:latin typeface="Consolas"/>
               </a:rPr>
-              <a:t>// XATO! const qiymatini o'zgartirib bo'lmaydi</a:t>
-            </a:r>
+              <a:t>// XATO! const </a:t>
+            </a:r>
+            <a:r>
+              <a:rPr sz="1600" dirty="0" err="1">
+                <a:solidFill>
+                  <a:srgbClr val="6A9955"/>
+                </a:solidFill>
+                <a:latin typeface="Consolas"/>
+              </a:rPr>
+              <a:t>qiymatini</a:t>
+            </a:r>
+            <a:r>
+              <a:rPr sz="1600" dirty="0">
+                <a:solidFill>
+                  <a:srgbClr val="6A9955"/>
+                </a:solidFill>
+                <a:latin typeface="Consolas"/>
+              </a:rPr>
+              <a:t> </a:t>
+            </a:r>
+            <a:r>
+              <a:rPr sz="1600" dirty="0" err="1">
+                <a:solidFill>
+                  <a:srgbClr val="6A9955"/>
+                </a:solidFill>
+                <a:latin typeface="Consolas"/>
+              </a:rPr>
+              <a:t>o'zgartirib</a:t>
+            </a:r>
+            <a:r>
+              <a:rPr sz="1600" dirty="0">
+                <a:solidFill>
+                  <a:srgbClr val="6A9955"/>
+                </a:solidFill>
+                <a:latin typeface="Consolas"/>
+              </a:rPr>
+              <a:t> </a:t>
+            </a:r>
+            <a:r>
+              <a:rPr sz="1600" dirty="0" err="1">
+                <a:solidFill>
+                  <a:srgbClr val="6A9955"/>
+                </a:solidFill>
+                <a:latin typeface="Consolas"/>
+              </a:rPr>
+              <a:t>bo'lmaydi</a:t>
+            </a:r>
+            <a:endParaRPr sz="1600" dirty="0">
+              <a:solidFill>
+                <a:srgbClr val="6A9955"/>
+              </a:solidFill>
+              <a:latin typeface="Consolas"/>
+            </a:endParaRPr>
           </a:p>
         </p:txBody>
       </p:sp>
@@ -12368,20 +12569,107 @@
           <a:bodyPr wrap="square" lIns="274320" tIns="411480" rIns="182880" rtlCol="0" anchor="ctr"/>
           <a:lstStyle/>
           <a:p>
-            <a:pPr algn="ctr">
+            <a:pPr>
               <a:lnSpc>
                 <a:spcPct val="122000"/>
               </a:lnSpc>
             </a:pPr>
             <a:r>
-              <a:rPr sz="1600">
+              <a:rPr sz="1600" dirty="0">
                 <a:solidFill>
                   <a:srgbClr val="6A9955"/>
                 </a:solidFill>
                 <a:latin typeface="Consolas"/>
               </a:rPr>
-              <a:t>// Talabaning yoshini hisoblash uchun o'zgaruvchi</a:t>
-            </a:r>
+              <a:t>// </a:t>
+            </a:r>
+            <a:r>
+              <a:rPr sz="1600" dirty="0" err="1">
+                <a:solidFill>
+                  <a:srgbClr val="6A9955"/>
+                </a:solidFill>
+                <a:latin typeface="Consolas"/>
+              </a:rPr>
+              <a:t>Talabaning</a:t>
+            </a:r>
+            <a:r>
+              <a:rPr sz="1600" dirty="0">
+                <a:solidFill>
+                  <a:srgbClr val="6A9955"/>
+                </a:solidFill>
+                <a:latin typeface="Consolas"/>
+              </a:rPr>
+              <a:t> </a:t>
+            </a:r>
+            <a:r>
+              <a:rPr sz="1600" dirty="0" err="1">
+                <a:solidFill>
+                  <a:srgbClr val="6A9955"/>
+                </a:solidFill>
+                <a:latin typeface="Consolas"/>
+              </a:rPr>
+              <a:t>yoshini</a:t>
+            </a:r>
+            <a:r>
+              <a:rPr sz="1600" dirty="0">
+                <a:solidFill>
+                  <a:srgbClr val="6A9955"/>
+                </a:solidFill>
+                <a:latin typeface="Consolas"/>
+              </a:rPr>
+              <a:t> </a:t>
+            </a:r>
+            <a:r>
+              <a:rPr sz="1600" dirty="0" err="1">
+                <a:solidFill>
+                  <a:srgbClr val="6A9955"/>
+                </a:solidFill>
+                <a:latin typeface="Consolas"/>
+              </a:rPr>
+              <a:t>hisoblash</a:t>
+            </a:r>
+            <a:r>
+              <a:rPr sz="1600" dirty="0">
+                <a:solidFill>
+                  <a:srgbClr val="6A9955"/>
+                </a:solidFill>
+                <a:latin typeface="Consolas"/>
+              </a:rPr>
+              <a:t> </a:t>
+            </a:r>
+            <a:r>
+              <a:rPr sz="1600" dirty="0" err="1">
+                <a:solidFill>
+                  <a:srgbClr val="6A9955"/>
+                </a:solidFill>
+                <a:latin typeface="Consolas"/>
+              </a:rPr>
+              <a:t>uchun</a:t>
+            </a:r>
+            <a:r>
+              <a:rPr sz="1600" dirty="0">
+                <a:solidFill>
+                  <a:srgbClr val="6A9955"/>
+                </a:solidFill>
+                <a:latin typeface="Consolas"/>
+              </a:rPr>
+              <a:t> </a:t>
+            </a:r>
+            <a:r>
+              <a:rPr sz="1600" dirty="0" err="1">
+                <a:solidFill>
+                  <a:srgbClr val="6A9955"/>
+                </a:solidFill>
+                <a:latin typeface="Consolas"/>
+              </a:rPr>
+              <a:t>o'zgaruvchi</a:t>
+            </a:r>
+            <a:endParaRPr sz="1600" dirty="0">
+              <a:solidFill>
+                <a:srgbClr val="6A9955"/>
+              </a:solidFill>
+              <a:latin typeface="Consolas"/>
+            </a:endParaRPr>
           </a:p>
           <a:p>
             <a:pPr>
@@ -12390,7 +12678,7 @@
               </a:lnSpc>
             </a:pPr>
             <a:r>
-              <a:rPr sz="1600">
+              <a:rPr sz="1600" dirty="0">
                 <a:solidFill>
                   <a:srgbClr val="569CD6"/>
                 </a:solidFill>
@@ -12399,16 +12687,34 @@
               <a:t>int</a:t>
             </a:r>
             <a:r>
-              <a:rPr sz="1600">
+              <a:rPr sz="1600" dirty="0">
                 <a:solidFill>
                   <a:srgbClr val="D4D4D4"/>
                 </a:solidFill>
                 <a:latin typeface="Consolas"/>
               </a:rPr>
-              <a:t> yosh = </a:t>
-            </a:r>
-            <a:r>
-              <a:rPr sz="1600">
+              <a:t> </a:t>
+            </a:r>
+            <a:r>
+              <a:rPr sz="1600" dirty="0" err="1">
+                <a:solidFill>
+                  <a:srgbClr val="D4D4D4"/>
+                </a:solidFill>
+                <a:latin typeface="Consolas"/>
+              </a:rPr>
+              <a:t>yosh</a:t>
+            </a:r>
+            <a:r>
+              <a:rPr sz="1600" dirty="0">
+                <a:solidFill>
+                  <a:srgbClr val="D4D4D4"/>
+                </a:solidFill>
+                <a:latin typeface="Consolas"/>
+              </a:rPr>
+              <a:t> = </a:t>
+            </a:r>
+            <a:r>
+              <a:rPr sz="1600" dirty="0">
                 <a:solidFill>
                   <a:srgbClr val="CE9178"/>
                 </a:solidFill>
@@ -12417,7 +12723,7 @@
               <a:t>20</a:t>
             </a:r>
             <a:r>
-              <a:rPr sz="1600">
+              <a:rPr sz="1600" dirty="0">
                 <a:solidFill>
                   <a:srgbClr val="D4D4D4"/>
                 </a:solidFill>
@@ -12433,7 +12739,7 @@
               </a:lnSpc>
             </a:pPr>
             <a:r>
-              <a:rPr sz="1600">
+              <a:rPr sz="1600" dirty="0">
                 <a:solidFill>
                   <a:srgbClr val="D4D4D4"/>
                 </a:solidFill>
@@ -12449,7 +12755,7 @@
               </a:lnSpc>
             </a:pPr>
             <a:r>
-              <a:rPr sz="1600">
+              <a:rPr sz="1600" dirty="0">
                 <a:solidFill>
                   <a:srgbClr val="6A9955"/>
                 </a:solidFill>
@@ -12465,14 +12771,83 @@
               </a:lnSpc>
             </a:pPr>
             <a:r>
-              <a:rPr sz="1600">
+              <a:rPr sz="1600" dirty="0">
                 <a:solidFill>
                   <a:srgbClr val="6A9955"/>
                 </a:solidFill>
                 <a:latin typeface="Consolas"/>
               </a:rPr>
-              <a:t>   Bu qism talaba haqidagi ma'lumotlarni</a:t>
-            </a:r>
+              <a:t>   Bu </a:t>
+            </a:r>
+            <a:r>
+              <a:rPr sz="1600" dirty="0" err="1">
+                <a:solidFill>
+                  <a:srgbClr val="6A9955"/>
+                </a:solidFill>
+                <a:latin typeface="Consolas"/>
+              </a:rPr>
+              <a:t>qism</a:t>
+            </a:r>
+            <a:r>
+              <a:rPr sz="1600" dirty="0">
+                <a:solidFill>
+                  <a:srgbClr val="6A9955"/>
+                </a:solidFill>
+                <a:latin typeface="Consolas"/>
+              </a:rPr>
+              <a:t> </a:t>
+            </a:r>
+            <a:r>
+              <a:rPr sz="1600" dirty="0" err="1">
+                <a:solidFill>
+                  <a:srgbClr val="6A9955"/>
+                </a:solidFill>
+                <a:latin typeface="Consolas"/>
+              </a:rPr>
+              <a:t>talaba</a:t>
+            </a:r>
+            <a:r>
+              <a:rPr sz="1600" dirty="0">
+                <a:solidFill>
+                  <a:srgbClr val="6A9955"/>
+                </a:solidFill>
+                <a:latin typeface="Consolas"/>
+              </a:rPr>
+              <a:t> </a:t>
+            </a:r>
+            <a:r>
+              <a:rPr sz="1600" dirty="0" err="1">
+                <a:solidFill>
+                  <a:srgbClr val="6A9955"/>
+                </a:solidFill>
+                <a:latin typeface="Consolas"/>
+              </a:rPr>
+              <a:t>haqidagi</a:t>
+            </a:r>
+            <a:r>
+              <a:rPr sz="1600" dirty="0">
+                <a:solidFill>
+                  <a:srgbClr val="6A9955"/>
+                </a:solidFill>
+                <a:latin typeface="Consolas"/>
+              </a:rPr>
+              <a:t> </a:t>
+            </a:r>
+            <a:r>
+              <a:rPr sz="1600" dirty="0" err="1">
+                <a:solidFill>
+                  <a:srgbClr val="6A9955"/>
+                </a:solidFill>
+                <a:latin typeface="Consolas"/>
+              </a:rPr>
+              <a:t>ma'lumotlarni</a:t>
+            </a:r>
+            <a:endParaRPr sz="1600" dirty="0">
+              <a:solidFill>
+                <a:srgbClr val="6A9955"/>
+              </a:solidFill>
+              <a:latin typeface="Consolas"/>
+            </a:endParaRPr>
           </a:p>
           <a:p>
             <a:pPr>
@@ -12481,13 +12856,85 @@
               </a:lnSpc>
             </a:pPr>
             <a:r>
-              <a:rPr sz="1600">
+              <a:rPr sz="1600" dirty="0">
                 <a:solidFill>
                   <a:srgbClr val="6A9955"/>
                 </a:solidFill>
                 <a:latin typeface="Consolas"/>
               </a:rPr>
-              <a:t>   ekranga chiqarish uchun ishlatiladi.</a:t>
+              <a:t>   </a:t>
+            </a:r>
+            <a:r>
+              <a:rPr sz="1600" dirty="0" err="1">
+                <a:solidFill>
+                  <a:srgbClr val="6A9955"/>
+                </a:solidFill>
+                <a:latin typeface="Consolas"/>
+              </a:rPr>
+              <a:t>ekranga</a:t>
+            </a:r>
+            <a:r>
+              <a:rPr sz="1600" dirty="0">
+                <a:solidFill>
+                  <a:srgbClr val="6A9955"/>
+                </a:solidFill>
+                <a:latin typeface="Consolas"/>
+              </a:rPr>
+              <a:t> </a:t>
+            </a:r>
+            <a:r>
+              <a:rPr sz="1600" dirty="0" err="1">
+                <a:solidFill>
+                  <a:srgbClr val="6A9955"/>
+                </a:solidFill>
+                <a:latin typeface="Consolas"/>
+              </a:rPr>
+              <a:t>chiqarish</a:t>
+            </a:r>
+            <a:r>
+              <a:rPr sz="1600" dirty="0">
+                <a:solidFill>
+                  <a:srgbClr val="6A9955"/>
+                </a:solidFill>
+                <a:latin typeface="Consolas"/>
+              </a:rPr>
+              <a:t> </a:t>
+            </a:r>
+            <a:r>
+              <a:rPr sz="1600" dirty="0" err="1">
+                <a:solidFill>
+                  <a:srgbClr val="6A9955"/>
+                </a:solidFill>
+                <a:latin typeface="Consolas"/>
+              </a:rPr>
+              <a:t>uchun</a:t>
+            </a:r>
+            <a:r>
+              <a:rPr sz="1600" dirty="0">
+                <a:solidFill>
+                  <a:srgbClr val="6A9955"/>
+                </a:solidFill>
+                <a:latin typeface="Consolas"/>
+              </a:rPr>
+              <a:t> </a:t>
+            </a:r>
+            <a:r>
+              <a:rPr sz="1600" dirty="0" err="1">
+                <a:solidFill>
+                  <a:srgbClr val="6A9955"/>
+                </a:solidFill>
+                <a:latin typeface="Consolas"/>
+              </a:rPr>
+              <a:t>ishlatiladi</a:t>
+            </a:r>
+            <a:r>
+              <a:rPr sz="1600" dirty="0">
+                <a:solidFill>
+                  <a:srgbClr val="6A9955"/>
+                </a:solidFill>
+                <a:latin typeface="Consolas"/>
+              </a:rPr>
+              <a:t>.</a:t>
             </a:r>
           </a:p>
           <a:p>
@@ -12497,7 +12944,7 @@
               </a:lnSpc>
             </a:pPr>
             <a:r>
-              <a:rPr sz="1600">
+              <a:rPr sz="1600" dirty="0">
                 <a:solidFill>
                   <a:srgbClr val="6A9955"/>
                 </a:solidFill>
@@ -12513,7 +12960,7 @@
               </a:lnSpc>
             </a:pPr>
             <a:r>
-              <a:rPr sz="1600">
+              <a:rPr sz="1600" dirty="0" err="1">
                 <a:solidFill>
                   <a:srgbClr val="4EC9B0"/>
                 </a:solidFill>
@@ -12522,7 +12969,7 @@
               <a:t>Console</a:t>
             </a:r>
             <a:r>
-              <a:rPr sz="1600">
+              <a:rPr sz="1600" dirty="0" err="1">
                 <a:solidFill>
                   <a:srgbClr val="D4D4D4"/>
                 </a:solidFill>
@@ -12531,7 +12978,7 @@
               <a:t>.</a:t>
             </a:r>
             <a:r>
-              <a:rPr sz="1600">
+              <a:rPr sz="1600" dirty="0" err="1">
                 <a:solidFill>
                   <a:srgbClr val="DCDCAA"/>
                 </a:solidFill>
@@ -12540,13 +12987,31 @@
               <a:t>WriteLine</a:t>
             </a:r>
             <a:r>
-              <a:rPr sz="1600">
+              <a:rPr sz="1600" dirty="0">
                 <a:solidFill>
                   <a:srgbClr val="D4D4D4"/>
                 </a:solidFill>
                 <a:latin typeface="Consolas"/>
               </a:rPr>
-              <a:t>(yosh);</a:t>
+              <a:t>(</a:t>
+            </a:r>
+            <a:r>
+              <a:rPr sz="1600" dirty="0" err="1">
+                <a:solidFill>
+                  <a:srgbClr val="D4D4D4"/>
+                </a:solidFill>
+                <a:latin typeface="Consolas"/>
+              </a:rPr>
+              <a:t>yosh</a:t>
+            </a:r>
+            <a:r>
+              <a:rPr sz="1600" dirty="0">
+                <a:solidFill>
+                  <a:srgbClr val="D4D4D4"/>
+                </a:solidFill>
+                <a:latin typeface="Consolas"/>
+              </a:rPr>
+              <a:t>);</a:t>
             </a:r>
           </a:p>
         </p:txBody>
@@ -17043,14 +17508,101 @@
               </a:spcAft>
             </a:pPr>
             <a:r>
-              <a:rPr sz="1800">
+              <a:rPr sz="1800" dirty="0">
                 <a:solidFill>
                   <a:srgbClr val="23232B"/>
                 </a:solidFill>
                 <a:latin typeface="Segoe UI"/>
               </a:rPr>
-              <a:t>•  I-BO'LIM: Alfavit, identifikatorlar va kalit so'zlar</a:t>
-            </a:r>
+              <a:t>•  I-BO'LIM: </a:t>
+            </a:r>
+            <a:r>
+              <a:rPr sz="1800" dirty="0" err="1">
+                <a:solidFill>
+                  <a:srgbClr val="23232B"/>
+                </a:solidFill>
+                <a:latin typeface="Segoe UI"/>
+              </a:rPr>
+              <a:t>Alfavit</a:t>
+            </a:r>
+            <a:r>
+              <a:rPr sz="1800" dirty="0">
+                <a:solidFill>
+                  <a:srgbClr val="23232B"/>
+                </a:solidFill>
+                <a:latin typeface="Segoe UI"/>
+              </a:rPr>
+              <a:t>, </a:t>
+            </a:r>
+            <a:r>
+              <a:rPr sz="1800" dirty="0" err="1">
+                <a:solidFill>
+                  <a:srgbClr val="23232B"/>
+                </a:solidFill>
+                <a:latin typeface="Segoe UI"/>
+              </a:rPr>
+              <a:t>identifikatorlar</a:t>
+            </a:r>
+            <a:r>
+              <a:rPr sz="1800" dirty="0">
+                <a:solidFill>
+                  <a:srgbClr val="23232B"/>
+                </a:solidFill>
+                <a:latin typeface="Segoe UI"/>
+              </a:rPr>
+              <a:t> </a:t>
+            </a:r>
+            <a:r>
+              <a:rPr sz="1800" dirty="0" err="1">
+                <a:solidFill>
+                  <a:srgbClr val="23232B"/>
+                </a:solidFill>
+                <a:latin typeface="Segoe UI"/>
+              </a:rPr>
+              <a:t>va</a:t>
+            </a:r>
+            <a:r>
+              <a:rPr sz="1800" dirty="0">
+                <a:solidFill>
+                  <a:srgbClr val="23232B"/>
+                </a:solidFill>
+                <a:latin typeface="Segoe UI"/>
+              </a:rPr>
+              <a:t> </a:t>
+            </a:r>
+            <a:r>
+              <a:rPr sz="1800" dirty="0" err="1">
+                <a:solidFill>
+                  <a:srgbClr val="23232B"/>
+                </a:solidFill>
+                <a:latin typeface="Segoe UI"/>
+              </a:rPr>
+              <a:t>kalit</a:t>
+            </a:r>
+            <a:r>
+              <a:rPr sz="1800" dirty="0">
+                <a:solidFill>
+                  <a:srgbClr val="23232B"/>
+                </a:solidFill>
+                <a:latin typeface="Segoe UI"/>
+              </a:rPr>
+              <a:t> </a:t>
+            </a:r>
+            <a:r>
+              <a:rPr sz="1800" dirty="0" err="1">
+                <a:solidFill>
+                  <a:srgbClr val="23232B"/>
+                </a:solidFill>
+                <a:latin typeface="Segoe UI"/>
+              </a:rPr>
+              <a:t>so'zlar</a:t>
+            </a:r>
+            <a:endParaRPr sz="1800" dirty="0">
+              <a:solidFill>
+                <a:srgbClr val="23232B"/>
+              </a:solidFill>
+              <a:latin typeface="Segoe UI"/>
+            </a:endParaRPr>
           </a:p>
           <a:p>
             <a:pPr>
@@ -17062,14 +17614,83 @@
               </a:spcAft>
             </a:pPr>
             <a:r>
-              <a:rPr sz="1600">
+              <a:rPr sz="1600" dirty="0">
                 <a:solidFill>
                   <a:srgbClr val="23232B"/>
                 </a:solidFill>
                 <a:latin typeface="Segoe UI"/>
               </a:rPr>
-              <a:t>     –  C# alifbosi, identifikator yozish qoidalari</a:t>
-            </a:r>
+              <a:t>     –  C# </a:t>
+            </a:r>
+            <a:r>
+              <a:rPr sz="1600" dirty="0" err="1">
+                <a:solidFill>
+                  <a:srgbClr val="23232B"/>
+                </a:solidFill>
+                <a:latin typeface="Segoe UI"/>
+              </a:rPr>
+              <a:t>alifbosi</a:t>
+            </a:r>
+            <a:r>
+              <a:rPr sz="1600" dirty="0">
+                <a:solidFill>
+                  <a:srgbClr val="23232B"/>
+                </a:solidFill>
+                <a:latin typeface="Segoe UI"/>
+              </a:rPr>
+              <a:t>, </a:t>
+            </a:r>
+            <a:r>
+              <a:rPr sz="1600" dirty="0" err="1">
+                <a:solidFill>
+                  <a:srgbClr val="23232B"/>
+                </a:solidFill>
+                <a:latin typeface="Segoe UI"/>
+              </a:rPr>
+              <a:t>identifikator</a:t>
+            </a:r>
+            <a:r>
+              <a:rPr sz="1600" dirty="0">
+                <a:solidFill>
+                  <a:srgbClr val="23232B"/>
+                </a:solidFill>
+                <a:latin typeface="Segoe UI"/>
+              </a:rPr>
+              <a:t> </a:t>
+            </a:r>
+            <a:r>
+              <a:rPr sz="1600" dirty="0" err="1">
+                <a:solidFill>
+                  <a:srgbClr val="23232B"/>
+                </a:solidFill>
+                <a:latin typeface="Segoe UI"/>
+              </a:rPr>
+              <a:t>yozish</a:t>
+            </a:r>
+            <a:r>
+              <a:rPr sz="1600" dirty="0">
+                <a:solidFill>
+                  <a:srgbClr val="23232B"/>
+                </a:solidFill>
+                <a:latin typeface="Segoe UI"/>
+              </a:rPr>
+              <a:t> </a:t>
+            </a:r>
+            <a:r>
+              <a:rPr sz="1600" dirty="0" err="1">
+                <a:solidFill>
+                  <a:srgbClr val="23232B"/>
+                </a:solidFill>
+                <a:latin typeface="Segoe UI"/>
+              </a:rPr>
+              <a:t>qoidalari</a:t>
+            </a:r>
+            <a:endParaRPr sz="1600" dirty="0">
+              <a:solidFill>
+                <a:srgbClr val="23232B"/>
+              </a:solidFill>
+              <a:latin typeface="Segoe UI"/>
+            </a:endParaRPr>
           </a:p>
           <a:p>
             <a:pPr>
@@ -17081,14 +17702,83 @@
               </a:spcAft>
             </a:pPr>
             <a:r>
-              <a:rPr sz="1600">
+              <a:rPr sz="1600" dirty="0">
                 <a:solidFill>
                   <a:srgbClr val="23232B"/>
                 </a:solidFill>
                 <a:latin typeface="Segoe UI"/>
               </a:rPr>
-              <a:t>     –  Kalit so'zlar (keywords) — band qilingan so'zlar</a:t>
-            </a:r>
+              <a:t>     –  </a:t>
+            </a:r>
+            <a:r>
+              <a:rPr sz="1600" dirty="0" err="1">
+                <a:solidFill>
+                  <a:srgbClr val="23232B"/>
+                </a:solidFill>
+                <a:latin typeface="Segoe UI"/>
+              </a:rPr>
+              <a:t>Kalit</a:t>
+            </a:r>
+            <a:r>
+              <a:rPr sz="1600" dirty="0">
+                <a:solidFill>
+                  <a:srgbClr val="23232B"/>
+                </a:solidFill>
+                <a:latin typeface="Segoe UI"/>
+              </a:rPr>
+              <a:t> </a:t>
+            </a:r>
+            <a:r>
+              <a:rPr sz="1600" dirty="0" err="1">
+                <a:solidFill>
+                  <a:srgbClr val="23232B"/>
+                </a:solidFill>
+                <a:latin typeface="Segoe UI"/>
+              </a:rPr>
+              <a:t>so'zlar</a:t>
+            </a:r>
+            <a:r>
+              <a:rPr sz="1600" dirty="0">
+                <a:solidFill>
+                  <a:srgbClr val="23232B"/>
+                </a:solidFill>
+                <a:latin typeface="Segoe UI"/>
+              </a:rPr>
+              <a:t> (keywords) — band </a:t>
+            </a:r>
+            <a:r>
+              <a:rPr sz="1600" dirty="0" err="1">
+                <a:solidFill>
+                  <a:srgbClr val="23232B"/>
+                </a:solidFill>
+                <a:latin typeface="Segoe UI"/>
+              </a:rPr>
+              <a:t>qilingan</a:t>
+            </a:r>
+            <a:r>
+              <a:rPr sz="1600" dirty="0">
+                <a:solidFill>
+                  <a:srgbClr val="23232B"/>
+                </a:solidFill>
+                <a:latin typeface="Segoe UI"/>
+              </a:rPr>
+              <a:t> </a:t>
+            </a:r>
+            <a:r>
+              <a:rPr sz="1600" dirty="0" err="1">
+                <a:solidFill>
+                  <a:srgbClr val="23232B"/>
+                </a:solidFill>
+                <a:latin typeface="Segoe UI"/>
+              </a:rPr>
+              <a:t>so'zlar</a:t>
+            </a:r>
+            <a:endParaRPr sz="1600" dirty="0">
+              <a:solidFill>
+                <a:srgbClr val="23232B"/>
+              </a:solidFill>
+              <a:latin typeface="Segoe UI"/>
+            </a:endParaRPr>
           </a:p>
           <a:p>
             <a:pPr>
@@ -17100,14 +17790,83 @@
               </a:spcAft>
             </a:pPr>
             <a:r>
-              <a:rPr sz="1800">
+              <a:rPr sz="1800" dirty="0">
                 <a:solidFill>
                   <a:srgbClr val="23232B"/>
                 </a:solidFill>
                 <a:latin typeface="Segoe UI"/>
               </a:rPr>
-              <a:t>•  II-BO'LIM: Literallar, o'zgaruvchilar, o'zgarmaslar, izohlar</a:t>
-            </a:r>
+              <a:t>•  II-BO'LIM: </a:t>
+            </a:r>
+            <a:r>
+              <a:rPr sz="1800" dirty="0" err="1">
+                <a:solidFill>
+                  <a:srgbClr val="23232B"/>
+                </a:solidFill>
+                <a:latin typeface="Segoe UI"/>
+              </a:rPr>
+              <a:t>Literallar</a:t>
+            </a:r>
+            <a:r>
+              <a:rPr sz="1800" dirty="0">
+                <a:solidFill>
+                  <a:srgbClr val="23232B"/>
+                </a:solidFill>
+                <a:latin typeface="Segoe UI"/>
+              </a:rPr>
+              <a:t>, </a:t>
+            </a:r>
+            <a:r>
+              <a:rPr sz="1800" dirty="0" err="1">
+                <a:solidFill>
+                  <a:srgbClr val="23232B"/>
+                </a:solidFill>
+                <a:latin typeface="Segoe UI"/>
+              </a:rPr>
+              <a:t>o'zgaruvchilar</a:t>
+            </a:r>
+            <a:r>
+              <a:rPr sz="1800" dirty="0">
+                <a:solidFill>
+                  <a:srgbClr val="23232B"/>
+                </a:solidFill>
+                <a:latin typeface="Segoe UI"/>
+              </a:rPr>
+              <a:t>, </a:t>
+            </a:r>
+            <a:r>
+              <a:rPr sz="1800" dirty="0" err="1">
+                <a:solidFill>
+                  <a:srgbClr val="23232B"/>
+                </a:solidFill>
+                <a:latin typeface="Segoe UI"/>
+              </a:rPr>
+              <a:t>o'zgarmaslar</a:t>
+            </a:r>
+            <a:r>
+              <a:rPr sz="1800" dirty="0">
+                <a:solidFill>
+                  <a:srgbClr val="23232B"/>
+                </a:solidFill>
+                <a:latin typeface="Segoe UI"/>
+              </a:rPr>
+              <a:t>, </a:t>
+            </a:r>
+            <a:r>
+              <a:rPr sz="1800" dirty="0" err="1">
+                <a:solidFill>
+                  <a:srgbClr val="23232B"/>
+                </a:solidFill>
+                <a:latin typeface="Segoe UI"/>
+              </a:rPr>
+              <a:t>izohlar</a:t>
+            </a:r>
+            <a:endParaRPr sz="1800" dirty="0">
+              <a:solidFill>
+                <a:srgbClr val="23232B"/>
+              </a:solidFill>
+              <a:latin typeface="Segoe UI"/>
+            </a:endParaRPr>
           </a:p>
           <a:p>
             <a:pPr>
@@ -17119,14 +17878,119 @@
               </a:spcAft>
             </a:pPr>
             <a:r>
-              <a:rPr sz="1600">
+              <a:rPr sz="1600" dirty="0">
                 <a:solidFill>
                   <a:srgbClr val="23232B"/>
                 </a:solidFill>
                 <a:latin typeface="Segoe UI"/>
               </a:rPr>
-              <a:t>     –  Literal turlari, o'zgaruvchi va o'zgarmas e'lon qilish</a:t>
-            </a:r>
+              <a:t>     –  Literal </a:t>
+            </a:r>
+            <a:r>
+              <a:rPr sz="1600" dirty="0" err="1">
+                <a:solidFill>
+                  <a:srgbClr val="23232B"/>
+                </a:solidFill>
+                <a:latin typeface="Segoe UI"/>
+              </a:rPr>
+              <a:t>turlari</a:t>
+            </a:r>
+            <a:r>
+              <a:rPr sz="1600" dirty="0">
+                <a:solidFill>
+                  <a:srgbClr val="23232B"/>
+                </a:solidFill>
+                <a:latin typeface="Segoe UI"/>
+              </a:rPr>
+              <a:t>, </a:t>
+            </a:r>
+            <a:r>
+              <a:rPr sz="1600" dirty="0" err="1">
+                <a:solidFill>
+                  <a:srgbClr val="23232B"/>
+                </a:solidFill>
+                <a:latin typeface="Segoe UI"/>
+              </a:rPr>
+              <a:t>o'zgaruvchi</a:t>
+            </a:r>
+            <a:r>
+              <a:rPr sz="1600" dirty="0">
+                <a:solidFill>
+                  <a:srgbClr val="23232B"/>
+                </a:solidFill>
+                <a:latin typeface="Segoe UI"/>
+              </a:rPr>
+              <a:t> </a:t>
+            </a:r>
+            <a:r>
+              <a:rPr sz="1600" dirty="0" err="1">
+                <a:solidFill>
+                  <a:srgbClr val="23232B"/>
+                </a:solidFill>
+                <a:latin typeface="Segoe UI"/>
+              </a:rPr>
+              <a:t>va</a:t>
+            </a:r>
+            <a:r>
+              <a:rPr sz="1600" dirty="0">
+                <a:solidFill>
+                  <a:srgbClr val="23232B"/>
+                </a:solidFill>
+                <a:latin typeface="Segoe UI"/>
+              </a:rPr>
+              <a:t> </a:t>
+            </a:r>
+            <a:r>
+              <a:rPr sz="1600" dirty="0" err="1">
+                <a:solidFill>
+                  <a:srgbClr val="23232B"/>
+                </a:solidFill>
+                <a:latin typeface="Segoe UI"/>
+              </a:rPr>
+              <a:t>o'zgarmas</a:t>
+            </a:r>
+            <a:r>
+              <a:rPr sz="1600" dirty="0">
+                <a:solidFill>
+                  <a:srgbClr val="23232B"/>
+                </a:solidFill>
+                <a:latin typeface="Segoe UI"/>
+              </a:rPr>
+              <a:t> </a:t>
+            </a:r>
+            <a:r>
+              <a:rPr sz="1600" dirty="0" err="1">
+                <a:solidFill>
+                  <a:srgbClr val="23232B"/>
+                </a:solidFill>
+                <a:latin typeface="Segoe UI"/>
+              </a:rPr>
+              <a:t>e'lon</a:t>
+            </a:r>
+            <a:r>
+              <a:rPr sz="1600" dirty="0">
+                <a:solidFill>
+                  <a:srgbClr val="23232B"/>
+                </a:solidFill>
+                <a:latin typeface="Segoe UI"/>
+              </a:rPr>
+              <a:t> </a:t>
+            </a:r>
+            <a:r>
+              <a:rPr sz="1600" dirty="0" err="1">
+                <a:solidFill>
+                  <a:srgbClr val="23232B"/>
+                </a:solidFill>
+                <a:latin typeface="Segoe UI"/>
+              </a:rPr>
+              <a:t>qilish</a:t>
+            </a:r>
+            <a:endParaRPr sz="1600" dirty="0">
+              <a:solidFill>
+                <a:srgbClr val="23232B"/>
+              </a:solidFill>
+              <a:latin typeface="Segoe UI"/>
+            </a:endParaRPr>
           </a:p>
           <a:p>
             <a:pPr>
@@ -17138,14 +18002,65 @@
               </a:spcAft>
             </a:pPr>
             <a:r>
-              <a:rPr sz="1600">
+              <a:rPr sz="1600" dirty="0">
                 <a:solidFill>
                   <a:srgbClr val="23232B"/>
                 </a:solidFill>
                 <a:latin typeface="Segoe UI"/>
               </a:rPr>
-              <a:t>     –  Izohlar (comments) yozish usullari</a:t>
-            </a:r>
+              <a:t>     –  </a:t>
+            </a:r>
+            <a:r>
+              <a:rPr sz="1600" dirty="0" err="1">
+                <a:solidFill>
+                  <a:srgbClr val="23232B"/>
+                </a:solidFill>
+                <a:latin typeface="Segoe UI"/>
+              </a:rPr>
+              <a:t>Izohlar</a:t>
+            </a:r>
+            <a:r>
+              <a:rPr sz="1600" dirty="0">
+                <a:solidFill>
+                  <a:srgbClr val="23232B"/>
+                </a:solidFill>
+                <a:latin typeface="Segoe UI"/>
+              </a:rPr>
+              <a:t> (comments) </a:t>
+            </a:r>
+            <a:r>
+              <a:rPr sz="1600" dirty="0" err="1">
+                <a:solidFill>
+                  <a:srgbClr val="23232B"/>
+                </a:solidFill>
+                <a:latin typeface="Segoe UI"/>
+              </a:rPr>
+              <a:t>yozish</a:t>
+            </a:r>
+            <a:r>
+              <a:rPr sz="1600" dirty="0">
+                <a:solidFill>
+                  <a:srgbClr val="23232B"/>
+                </a:solidFill>
+                <a:latin typeface="Segoe UI"/>
+              </a:rPr>
+              <a:t> </a:t>
+            </a:r>
+            <a:r>
+              <a:rPr sz="1600" dirty="0" err="1">
+                <a:solidFill>
+                  <a:srgbClr val="23232B"/>
+                </a:solidFill>
+                <a:latin typeface="Segoe UI"/>
+              </a:rPr>
+              <a:t>usullari</a:t>
+            </a:r>
+            <a:endParaRPr sz="1600" dirty="0">
+              <a:solidFill>
+                <a:srgbClr val="23232B"/>
+              </a:solidFill>
+              <a:latin typeface="Segoe UI"/>
+            </a:endParaRPr>
           </a:p>
           <a:p>
             <a:pPr>
@@ -17157,14 +18072,47 @@
               </a:spcAft>
             </a:pPr>
             <a:r>
-              <a:rPr sz="1800">
+              <a:rPr sz="1800" dirty="0">
                 <a:solidFill>
                   <a:srgbClr val="23232B"/>
                 </a:solidFill>
                 <a:latin typeface="Segoe UI"/>
               </a:rPr>
-              <a:t>•  III-BO'LIM: Berilganlar turlari</a:t>
-            </a:r>
+              <a:t>•  III-BO'LIM: </a:t>
+            </a:r>
+            <a:r>
+              <a:rPr sz="1800" dirty="0" err="1">
+                <a:solidFill>
+                  <a:srgbClr val="23232B"/>
+                </a:solidFill>
+                <a:latin typeface="Segoe UI"/>
+              </a:rPr>
+              <a:t>Berilganlar</a:t>
+            </a:r>
+            <a:r>
+              <a:rPr sz="1800" dirty="0">
+                <a:solidFill>
+                  <a:srgbClr val="23232B"/>
+                </a:solidFill>
+                <a:latin typeface="Segoe UI"/>
+              </a:rPr>
+              <a:t> </a:t>
+            </a:r>
+            <a:r>
+              <a:rPr sz="1800" dirty="0" err="1">
+                <a:solidFill>
+                  <a:srgbClr val="23232B"/>
+                </a:solidFill>
+                <a:latin typeface="Segoe UI"/>
+              </a:rPr>
+              <a:t>turlari</a:t>
+            </a:r>
+            <a:endParaRPr sz="1800" dirty="0">
+              <a:solidFill>
+                <a:srgbClr val="23232B"/>
+              </a:solidFill>
+              <a:latin typeface="Segoe UI"/>
+            </a:endParaRPr>
           </a:p>
           <a:p>
             <a:pPr>
@@ -17176,14 +18124,155 @@
               </a:spcAft>
             </a:pPr>
             <a:r>
-              <a:rPr sz="1600">
+              <a:rPr sz="1600" dirty="0">
                 <a:solidFill>
                   <a:srgbClr val="23232B"/>
                 </a:solidFill>
                 <a:latin typeface="Segoe UI"/>
               </a:rPr>
-              <a:t>     –  C#dagi asosiy turlar, ularni e'lon qilish, var kalit so'zi</a:t>
-            </a:r>
+              <a:t>     –  </a:t>
+            </a:r>
+            <a:r>
+              <a:rPr sz="1600" dirty="0" err="1">
+                <a:solidFill>
+                  <a:srgbClr val="23232B"/>
+                </a:solidFill>
+                <a:latin typeface="Segoe UI"/>
+              </a:rPr>
+              <a:t>C#dagi</a:t>
+            </a:r>
+            <a:r>
+              <a:rPr sz="1600" dirty="0">
+                <a:solidFill>
+                  <a:srgbClr val="23232B"/>
+                </a:solidFill>
+                <a:latin typeface="Segoe UI"/>
+              </a:rPr>
+              <a:t> </a:t>
+            </a:r>
+            <a:r>
+              <a:rPr sz="1600" dirty="0" err="1">
+                <a:solidFill>
+                  <a:srgbClr val="23232B"/>
+                </a:solidFill>
+                <a:latin typeface="Segoe UI"/>
+              </a:rPr>
+              <a:t>asosiy</a:t>
+            </a:r>
+            <a:r>
+              <a:rPr sz="1600" dirty="0">
+                <a:solidFill>
+                  <a:srgbClr val="23232B"/>
+                </a:solidFill>
+                <a:latin typeface="Segoe UI"/>
+              </a:rPr>
+              <a:t> </a:t>
+            </a:r>
+            <a:r>
+              <a:rPr sz="1600" dirty="0" err="1">
+                <a:solidFill>
+                  <a:srgbClr val="23232B"/>
+                </a:solidFill>
+                <a:latin typeface="Segoe UI"/>
+              </a:rPr>
+              <a:t>turlar</a:t>
+            </a:r>
+            <a:r>
+              <a:rPr sz="1600" dirty="0">
+                <a:solidFill>
+                  <a:srgbClr val="23232B"/>
+                </a:solidFill>
+                <a:latin typeface="Segoe UI"/>
+              </a:rPr>
+              <a:t>, </a:t>
+            </a:r>
+            <a:r>
+              <a:rPr sz="1600" dirty="0" err="1">
+                <a:solidFill>
+                  <a:srgbClr val="23232B"/>
+                </a:solidFill>
+                <a:latin typeface="Segoe UI"/>
+              </a:rPr>
+              <a:t>ularni</a:t>
+            </a:r>
+            <a:r>
+              <a:rPr sz="1600" dirty="0">
+                <a:solidFill>
+                  <a:srgbClr val="23232B"/>
+                </a:solidFill>
+                <a:latin typeface="Segoe UI"/>
+              </a:rPr>
+              <a:t> </a:t>
+            </a:r>
+            <a:r>
+              <a:rPr sz="1600" dirty="0" err="1">
+                <a:solidFill>
+                  <a:srgbClr val="23232B"/>
+                </a:solidFill>
+                <a:latin typeface="Segoe UI"/>
+              </a:rPr>
+              <a:t>e'lon</a:t>
+            </a:r>
+            <a:r>
+              <a:rPr sz="1600" dirty="0">
+                <a:solidFill>
+                  <a:srgbClr val="23232B"/>
+                </a:solidFill>
+                <a:latin typeface="Segoe UI"/>
+              </a:rPr>
+              <a:t> </a:t>
+            </a:r>
+            <a:r>
+              <a:rPr sz="1600" dirty="0" err="1">
+                <a:solidFill>
+                  <a:srgbClr val="23232B"/>
+                </a:solidFill>
+                <a:latin typeface="Segoe UI"/>
+              </a:rPr>
+              <a:t>qilish</a:t>
+            </a:r>
+            <a:r>
+              <a:rPr sz="1600" dirty="0">
+                <a:solidFill>
+                  <a:srgbClr val="23232B"/>
+                </a:solidFill>
+                <a:latin typeface="Segoe UI"/>
+              </a:rPr>
+              <a:t>, var </a:t>
+            </a:r>
+            <a:r>
+              <a:rPr sz="1600" dirty="0" err="1">
+                <a:solidFill>
+                  <a:srgbClr val="23232B"/>
+                </a:solidFill>
+                <a:latin typeface="Segoe UI"/>
+              </a:rPr>
+              <a:t>kalit</a:t>
+            </a:r>
+            <a:r>
+              <a:rPr sz="1600" dirty="0">
+                <a:solidFill>
+                  <a:srgbClr val="23232B"/>
+                </a:solidFill>
+                <a:latin typeface="Segoe UI"/>
+              </a:rPr>
+              <a:t> </a:t>
+            </a:r>
+            <a:r>
+              <a:rPr sz="1600" dirty="0" err="1">
+                <a:solidFill>
+                  <a:srgbClr val="23232B"/>
+                </a:solidFill>
+                <a:latin typeface="Segoe UI"/>
+              </a:rPr>
+              <a:t>so'zi</a:t>
+            </a:r>
+            <a:endParaRPr sz="1600" dirty="0">
+              <a:solidFill>
+                <a:srgbClr val="23232B"/>
+              </a:solidFill>
+              <a:latin typeface="Segoe UI"/>
+            </a:endParaRPr>
           </a:p>
         </p:txBody>
       </p:sp>
@@ -17547,13 +18636,13 @@
           <a:bodyPr wrap="square" lIns="274320" tIns="411480" rIns="182880" rtlCol="0" anchor="ctr"/>
           <a:lstStyle/>
           <a:p>
-            <a:pPr algn="ctr">
+            <a:pPr>
               <a:lnSpc>
                 <a:spcPct val="122000"/>
               </a:lnSpc>
             </a:pPr>
             <a:r>
-              <a:rPr sz="1600">
+              <a:rPr sz="1600" dirty="0">
                 <a:solidFill>
                   <a:srgbClr val="569CD6"/>
                 </a:solidFill>
@@ -17562,16 +18651,34 @@
               <a:t>bool</a:t>
             </a:r>
             <a:r>
-              <a:rPr sz="1600">
+              <a:rPr sz="1600" dirty="0">
                 <a:solidFill>
                   <a:srgbClr val="D4D4D4"/>
                 </a:solidFill>
                 <a:latin typeface="Consolas"/>
               </a:rPr>
-              <a:t> talabaMi = </a:t>
-            </a:r>
-            <a:r>
-              <a:rPr sz="1600">
+              <a:t> </a:t>
+            </a:r>
+            <a:r>
+              <a:rPr sz="1600" dirty="0" err="1">
+                <a:solidFill>
+                  <a:srgbClr val="D4D4D4"/>
+                </a:solidFill>
+                <a:latin typeface="Consolas"/>
+              </a:rPr>
+              <a:t>talabaMi</a:t>
+            </a:r>
+            <a:r>
+              <a:rPr sz="1600" dirty="0">
+                <a:solidFill>
+                  <a:srgbClr val="D4D4D4"/>
+                </a:solidFill>
+                <a:latin typeface="Consolas"/>
+              </a:rPr>
+              <a:t> = </a:t>
+            </a:r>
+            <a:r>
+              <a:rPr sz="1600" dirty="0">
                 <a:solidFill>
                   <a:srgbClr val="569CD6"/>
                 </a:solidFill>
@@ -17580,7 +18687,7 @@
               <a:t>true</a:t>
             </a:r>
             <a:r>
-              <a:rPr sz="1600">
+              <a:rPr sz="1600" dirty="0">
                 <a:solidFill>
                   <a:srgbClr val="D4D4D4"/>
                 </a:solidFill>
@@ -17596,7 +18703,7 @@
               </a:lnSpc>
             </a:pPr>
             <a:r>
-              <a:rPr sz="1600">
+              <a:rPr sz="1600" dirty="0">
                 <a:solidFill>
                   <a:srgbClr val="569CD6"/>
                 </a:solidFill>
@@ -17605,16 +18712,34 @@
               <a:t>int</a:t>
             </a:r>
             <a:r>
-              <a:rPr sz="1600">
+              <a:rPr sz="1600" dirty="0">
                 <a:solidFill>
                   <a:srgbClr val="D4D4D4"/>
                 </a:solidFill>
                 <a:latin typeface="Consolas"/>
               </a:rPr>
-              <a:t> kurs = </a:t>
-            </a:r>
-            <a:r>
-              <a:rPr sz="1600">
+              <a:t> </a:t>
+            </a:r>
+            <a:r>
+              <a:rPr sz="1600" dirty="0" err="1">
+                <a:solidFill>
+                  <a:srgbClr val="D4D4D4"/>
+                </a:solidFill>
+                <a:latin typeface="Consolas"/>
+              </a:rPr>
+              <a:t>kurs</a:t>
+            </a:r>
+            <a:r>
+              <a:rPr sz="1600" dirty="0">
+                <a:solidFill>
+                  <a:srgbClr val="D4D4D4"/>
+                </a:solidFill>
+                <a:latin typeface="Consolas"/>
+              </a:rPr>
+              <a:t> = </a:t>
+            </a:r>
+            <a:r>
+              <a:rPr sz="1600" dirty="0">
                 <a:solidFill>
                   <a:srgbClr val="CE9178"/>
                 </a:solidFill>
@@ -17623,7 +18748,7 @@
               <a:t>1</a:t>
             </a:r>
             <a:r>
-              <a:rPr sz="1600">
+              <a:rPr sz="1600" dirty="0">
                 <a:solidFill>
                   <a:srgbClr val="D4D4D4"/>
                 </a:solidFill>
@@ -17639,7 +18764,7 @@
               </a:lnSpc>
             </a:pPr>
             <a:r>
-              <a:rPr sz="1600">
+              <a:rPr sz="1600" dirty="0">
                 <a:solidFill>
                   <a:srgbClr val="569CD6"/>
                 </a:solidFill>
@@ -17648,16 +18773,34 @@
               <a:t>double</a:t>
             </a:r>
             <a:r>
-              <a:rPr sz="1600">
+              <a:rPr sz="1600" dirty="0">
                 <a:solidFill>
                   <a:srgbClr val="D4D4D4"/>
                 </a:solidFill>
                 <a:latin typeface="Consolas"/>
               </a:rPr>
-              <a:t> stipendiya = </a:t>
-            </a:r>
-            <a:r>
-              <a:rPr sz="1600">
+              <a:t> </a:t>
+            </a:r>
+            <a:r>
+              <a:rPr sz="1600" dirty="0" err="1">
+                <a:solidFill>
+                  <a:srgbClr val="D4D4D4"/>
+                </a:solidFill>
+                <a:latin typeface="Consolas"/>
+              </a:rPr>
+              <a:t>stipendiya</a:t>
+            </a:r>
+            <a:r>
+              <a:rPr sz="1600" dirty="0">
+                <a:solidFill>
+                  <a:srgbClr val="D4D4D4"/>
+                </a:solidFill>
+                <a:latin typeface="Consolas"/>
+              </a:rPr>
+              <a:t> = </a:t>
+            </a:r>
+            <a:r>
+              <a:rPr sz="1600" dirty="0">
                 <a:solidFill>
                   <a:srgbClr val="CE9178"/>
                 </a:solidFill>
@@ -17666,7 +18809,7 @@
               <a:t>450000.75</a:t>
             </a:r>
             <a:r>
-              <a:rPr sz="1600">
+              <a:rPr sz="1600" dirty="0">
                 <a:solidFill>
                   <a:srgbClr val="D4D4D4"/>
                 </a:solidFill>
@@ -17682,7 +18825,7 @@
               </a:lnSpc>
             </a:pPr>
             <a:r>
-              <a:rPr sz="1600">
+              <a:rPr sz="1600" dirty="0">
                 <a:solidFill>
                   <a:srgbClr val="569CD6"/>
                 </a:solidFill>
@@ -17691,16 +18834,34 @@
               <a:t>char</a:t>
             </a:r>
             <a:r>
-              <a:rPr sz="1600">
+              <a:rPr sz="1600" dirty="0">
                 <a:solidFill>
                   <a:srgbClr val="D4D4D4"/>
                 </a:solidFill>
                 <a:latin typeface="Consolas"/>
               </a:rPr>
-              <a:t> guruhHarfi = </a:t>
-            </a:r>
-            <a:r>
-              <a:rPr sz="1600">
+              <a:t> </a:t>
+            </a:r>
+            <a:r>
+              <a:rPr sz="1600" dirty="0" err="1">
+                <a:solidFill>
+                  <a:srgbClr val="D4D4D4"/>
+                </a:solidFill>
+                <a:latin typeface="Consolas"/>
+              </a:rPr>
+              <a:t>guruhHarfi</a:t>
+            </a:r>
+            <a:r>
+              <a:rPr sz="1600" dirty="0">
+                <a:solidFill>
+                  <a:srgbClr val="D4D4D4"/>
+                </a:solidFill>
+                <a:latin typeface="Consolas"/>
+              </a:rPr>
+              <a:t> = </a:t>
+            </a:r>
+            <a:r>
+              <a:rPr sz="1600" dirty="0">
                 <a:solidFill>
                   <a:srgbClr val="CE9178"/>
                 </a:solidFill>
@@ -17709,7 +18870,7 @@
               <a:t>'A'</a:t>
             </a:r>
             <a:r>
-              <a:rPr sz="1600">
+              <a:rPr sz="1600" dirty="0">
                 <a:solidFill>
                   <a:srgbClr val="D4D4D4"/>
                 </a:solidFill>
@@ -17725,7 +18886,7 @@
               </a:lnSpc>
             </a:pPr>
             <a:r>
-              <a:rPr sz="1600">
+              <a:rPr sz="1600" dirty="0">
                 <a:solidFill>
                   <a:srgbClr val="569CD6"/>
                 </a:solidFill>
@@ -17734,25 +18895,79 @@
               <a:t>string</a:t>
             </a:r>
             <a:r>
-              <a:rPr sz="1600">
+              <a:rPr sz="1600" dirty="0">
                 <a:solidFill>
                   <a:srgbClr val="D4D4D4"/>
                 </a:solidFill>
                 <a:latin typeface="Consolas"/>
               </a:rPr>
-              <a:t> fakultet = </a:t>
-            </a:r>
-            <a:r>
-              <a:rPr sz="1600">
+              <a:t> </a:t>
+            </a:r>
+            <a:r>
+              <a:rPr sz="1600" dirty="0" err="1">
+                <a:solidFill>
+                  <a:srgbClr val="D4D4D4"/>
+                </a:solidFill>
+                <a:latin typeface="Consolas"/>
+              </a:rPr>
+              <a:t>fakultet</a:t>
+            </a:r>
+            <a:r>
+              <a:rPr sz="1600" dirty="0">
+                <a:solidFill>
+                  <a:srgbClr val="D4D4D4"/>
+                </a:solidFill>
+                <a:latin typeface="Consolas"/>
+              </a:rPr>
+              <a:t> = </a:t>
+            </a:r>
+            <a:r>
+              <a:rPr sz="1600" dirty="0">
                 <a:solidFill>
                   <a:srgbClr val="CE9178"/>
                 </a:solidFill>
                 <a:latin typeface="Consolas"/>
               </a:rPr>
-              <a:t>"Amaliy matematika"</a:t>
-            </a:r>
-            <a:r>
-              <a:rPr sz="1600">
+              <a:t>"</a:t>
+            </a:r>
+            <a:r>
+              <a:rPr sz="1600" dirty="0" err="1">
+                <a:solidFill>
+                  <a:srgbClr val="CE9178"/>
+                </a:solidFill>
+                <a:latin typeface="Consolas"/>
+              </a:rPr>
+              <a:t>Amaliy</a:t>
+            </a:r>
+            <a:r>
+              <a:rPr sz="1600" dirty="0">
+                <a:solidFill>
+                  <a:srgbClr val="CE9178"/>
+                </a:solidFill>
+                <a:latin typeface="Consolas"/>
+              </a:rPr>
+              <a:t> </a:t>
+            </a:r>
+            <a:r>
+              <a:rPr sz="1600" dirty="0" err="1">
+                <a:solidFill>
+                  <a:srgbClr val="CE9178"/>
+                </a:solidFill>
+                <a:latin typeface="Consolas"/>
+              </a:rPr>
+              <a:t>matematika</a:t>
+            </a:r>
+            <a:r>
+              <a:rPr sz="1600" dirty="0">
+                <a:solidFill>
+                  <a:srgbClr val="CE9178"/>
+                </a:solidFill>
+                <a:latin typeface="Consolas"/>
+              </a:rPr>
+              <a:t>"</a:t>
+            </a:r>
+            <a:r>
+              <a:rPr sz="1600" dirty="0">
                 <a:solidFill>
                   <a:srgbClr val="D4D4D4"/>
                 </a:solidFill>
@@ -17768,7 +18983,7 @@
               </a:lnSpc>
             </a:pPr>
             <a:r>
-              <a:rPr sz="1600">
+              <a:rPr sz="1600" dirty="0" err="1">
                 <a:solidFill>
                   <a:srgbClr val="4EC9B0"/>
                 </a:solidFill>
@@ -17777,7 +18992,7 @@
               <a:t>Console</a:t>
             </a:r>
             <a:r>
-              <a:rPr sz="1600">
+              <a:rPr sz="1600" dirty="0" err="1">
                 <a:solidFill>
                   <a:srgbClr val="D4D4D4"/>
                 </a:solidFill>
@@ -17786,7 +19001,7 @@
               <a:t>.</a:t>
             </a:r>
             <a:r>
-              <a:rPr sz="1600">
+              <a:rPr sz="1600" dirty="0" err="1">
                 <a:solidFill>
                   <a:srgbClr val="DCDCAA"/>
                 </a:solidFill>
@@ -17795,7 +19010,7 @@
               <a:t>WriteLine</a:t>
             </a:r>
             <a:r>
-              <a:rPr sz="1600">
+              <a:rPr sz="1600" dirty="0">
                 <a:solidFill>
                   <a:srgbClr val="D4D4D4"/>
                 </a:solidFill>
@@ -17804,16 +19019,88 @@
               <a:t>(</a:t>
             </a:r>
             <a:r>
-              <a:rPr sz="1600">
+              <a:rPr sz="1600" dirty="0">
                 <a:solidFill>
                   <a:srgbClr val="CE9178"/>
                 </a:solidFill>
                 <a:latin typeface="Consolas"/>
               </a:rPr>
-              <a:t>$"Kurs: {kurs}, Fakultet: {fakultet}"</a:t>
-            </a:r>
-            <a:r>
-              <a:rPr sz="1600">
+              <a:t>$"</a:t>
+            </a:r>
+            <a:r>
+              <a:rPr sz="1600" dirty="0" err="1">
+                <a:solidFill>
+                  <a:srgbClr val="CE9178"/>
+                </a:solidFill>
+                <a:latin typeface="Consolas"/>
+              </a:rPr>
+              <a:t>Kurs</a:t>
+            </a:r>
+            <a:r>
+              <a:rPr sz="1600" dirty="0">
+                <a:solidFill>
+                  <a:srgbClr val="CE9178"/>
+                </a:solidFill>
+                <a:latin typeface="Consolas"/>
+              </a:rPr>
+              <a:t>: {</a:t>
+            </a:r>
+            <a:r>
+              <a:rPr sz="1600" dirty="0" err="1">
+                <a:solidFill>
+                  <a:srgbClr val="CE9178"/>
+                </a:solidFill>
+                <a:latin typeface="Consolas"/>
+              </a:rPr>
+              <a:t>kurs</a:t>
+            </a:r>
+            <a:r>
+              <a:rPr sz="1600" dirty="0">
+                <a:solidFill>
+                  <a:srgbClr val="CE9178"/>
+                </a:solidFill>
+                <a:latin typeface="Consolas"/>
+              </a:rPr>
+              <a:t>}, </a:t>
+            </a:r>
+            <a:r>
+              <a:rPr sz="1600" dirty="0" err="1">
+                <a:solidFill>
+                  <a:srgbClr val="CE9178"/>
+                </a:solidFill>
+                <a:latin typeface="Consolas"/>
+              </a:rPr>
+              <a:t>Fakultet</a:t>
+            </a:r>
+            <a:r>
+              <a:rPr sz="1600" dirty="0">
+                <a:solidFill>
+                  <a:srgbClr val="CE9178"/>
+                </a:solidFill>
+                <a:latin typeface="Consolas"/>
+              </a:rPr>
+              <a:t>: {</a:t>
+            </a:r>
+            <a:r>
+              <a:rPr sz="1600" dirty="0" err="1">
+                <a:solidFill>
+                  <a:srgbClr val="CE9178"/>
+                </a:solidFill>
+                <a:latin typeface="Consolas"/>
+              </a:rPr>
+              <a:t>fakultet</a:t>
+            </a:r>
+            <a:r>
+              <a:rPr sz="1600" dirty="0">
+                <a:solidFill>
+                  <a:srgbClr val="CE9178"/>
+                </a:solidFill>
+                <a:latin typeface="Consolas"/>
+              </a:rPr>
+              <a:t>}"</a:t>
+            </a:r>
+            <a:r>
+              <a:rPr sz="1600" dirty="0">
                 <a:solidFill>
                   <a:srgbClr val="D4D4D4"/>
                 </a:solidFill>
@@ -22834,7 +24121,7 @@
         <p:spPr>
           <a:xfrm>
             <a:off x="822960" y="3474720"/>
-            <a:ext cx="10058400" cy="2286000"/>
+            <a:ext cx="10058400" cy="1464183"/>
           </a:xfrm>
           <a:prstGeom prst="rect">
             <a:avLst/>
@@ -22856,14 +24143,65 @@
               </a:spcAft>
             </a:pPr>
             <a:r>
-              <a:rPr sz="1700">
+              <a:rPr sz="1700" dirty="0">
                 <a:solidFill>
                   <a:srgbClr val="D8D8F0"/>
                 </a:solidFill>
                 <a:latin typeface="Segoe UI"/>
               </a:rPr>
-              <a:t>•  📧 Aloqa uchun: (o'qituvchi email/telefon — dars vaqtida beriladi)</a:t>
-            </a:r>
+              <a:t>•  📧 </a:t>
+            </a:r>
+            <a:r>
+              <a:rPr sz="1700" dirty="0" err="1">
+                <a:solidFill>
+                  <a:srgbClr val="D8D8F0"/>
+                </a:solidFill>
+                <a:latin typeface="Segoe UI"/>
+              </a:rPr>
+              <a:t>Aloqa</a:t>
+            </a:r>
+            <a:r>
+              <a:rPr sz="1700" dirty="0">
+                <a:solidFill>
+                  <a:srgbClr val="D8D8F0"/>
+                </a:solidFill>
+                <a:latin typeface="Segoe UI"/>
+              </a:rPr>
+              <a:t> </a:t>
+            </a:r>
+            <a:r>
+              <a:rPr sz="1700" dirty="0" err="1">
+                <a:solidFill>
+                  <a:srgbClr val="D8D8F0"/>
+                </a:solidFill>
+                <a:latin typeface="Segoe UI"/>
+              </a:rPr>
+              <a:t>uchun</a:t>
+            </a:r>
+            <a:r>
+              <a:rPr sz="1700" dirty="0">
+                <a:solidFill>
+                  <a:srgbClr val="D8D8F0"/>
+                </a:solidFill>
+                <a:latin typeface="Segoe UI"/>
+              </a:rPr>
+              <a:t>: </a:t>
+            </a:r>
+            <a:r>
+              <a:rPr lang="en-US" altLang="ko-KR" sz="1700" dirty="0">
+                <a:solidFill>
+                  <a:srgbClr val="D8D8F0"/>
+                </a:solidFill>
+                <a:latin typeface="Segoe UI"/>
+              </a:rPr>
+              <a:t>muhiddin@gachon.ac.kr</a:t>
+            </a:r>
+            <a:endParaRPr sz="1700" dirty="0">
+              <a:solidFill>
+                <a:srgbClr val="D8D8F0"/>
+              </a:solidFill>
+              <a:latin typeface="Segoe UI"/>
+            </a:endParaRPr>
           </a:p>
           <a:p>
             <a:pPr>
@@ -22875,14 +24213,137 @@
               </a:spcAft>
             </a:pPr>
             <a:r>
-              <a:rPr sz="1700">
+              <a:rPr sz="1700" dirty="0">
                 <a:solidFill>
                   <a:srgbClr val="D8D8F0"/>
                 </a:solidFill>
                 <a:latin typeface="Segoe UI"/>
               </a:rPr>
-              <a:t>•  📝 Amaliy topshiriq va mashg'ulotlar — TA bilan davom etadi</a:t>
-            </a:r>
+              <a:t>•  📝 </a:t>
+            </a:r>
+            <a:r>
+              <a:rPr sz="1700" dirty="0" err="1">
+                <a:solidFill>
+                  <a:srgbClr val="D8D8F0"/>
+                </a:solidFill>
+                <a:latin typeface="Segoe UI"/>
+              </a:rPr>
+              <a:t>Amaliy</a:t>
+            </a:r>
+            <a:r>
+              <a:rPr sz="1700" dirty="0">
+                <a:solidFill>
+                  <a:srgbClr val="D8D8F0"/>
+                </a:solidFill>
+                <a:latin typeface="Segoe UI"/>
+              </a:rPr>
+              <a:t> </a:t>
+            </a:r>
+            <a:r>
+              <a:rPr sz="1700" dirty="0" err="1">
+                <a:solidFill>
+                  <a:srgbClr val="D8D8F0"/>
+                </a:solidFill>
+                <a:latin typeface="Segoe UI"/>
+              </a:rPr>
+              <a:t>topshiriq</a:t>
+            </a:r>
+            <a:r>
+              <a:rPr sz="1700" dirty="0">
+                <a:solidFill>
+                  <a:srgbClr val="D8D8F0"/>
+                </a:solidFill>
+                <a:latin typeface="Segoe UI"/>
+              </a:rPr>
+              <a:t> </a:t>
+            </a:r>
+            <a:r>
+              <a:rPr sz="1700" dirty="0" err="1">
+                <a:solidFill>
+                  <a:srgbClr val="D8D8F0"/>
+                </a:solidFill>
+                <a:latin typeface="Segoe UI"/>
+              </a:rPr>
+              <a:t>va</a:t>
+            </a:r>
+            <a:r>
+              <a:rPr sz="1700" dirty="0">
+                <a:solidFill>
+                  <a:srgbClr val="D8D8F0"/>
+                </a:solidFill>
+                <a:latin typeface="Segoe UI"/>
+              </a:rPr>
+              <a:t> </a:t>
+            </a:r>
+            <a:r>
+              <a:rPr sz="1700" dirty="0" err="1">
+                <a:solidFill>
+                  <a:srgbClr val="D8D8F0"/>
+                </a:solidFill>
+                <a:latin typeface="Segoe UI"/>
+              </a:rPr>
+              <a:t>mashg'ulotlar</a:t>
+            </a:r>
+            <a:r>
+              <a:rPr sz="1700" dirty="0">
+                <a:solidFill>
+                  <a:srgbClr val="D8D8F0"/>
+                </a:solidFill>
+                <a:latin typeface="Segoe UI"/>
+              </a:rPr>
+              <a:t> — TA </a:t>
+            </a:r>
+            <a:r>
+              <a:rPr sz="1700" dirty="0" err="1">
+                <a:solidFill>
+                  <a:srgbClr val="D8D8F0"/>
+                </a:solidFill>
+                <a:latin typeface="Segoe UI"/>
+              </a:rPr>
+              <a:t>bilan</a:t>
+            </a:r>
+            <a:r>
+              <a:rPr sz="1700" dirty="0">
+                <a:solidFill>
+                  <a:srgbClr val="D8D8F0"/>
+                </a:solidFill>
+                <a:latin typeface="Segoe UI"/>
+              </a:rPr>
+              <a:t> </a:t>
+            </a:r>
+            <a:r>
+              <a:rPr sz="1700" dirty="0" err="1">
+                <a:solidFill>
+                  <a:srgbClr val="D8D8F0"/>
+                </a:solidFill>
+                <a:latin typeface="Segoe UI"/>
+              </a:rPr>
+              <a:t>davom</a:t>
+            </a:r>
+            <a:r>
+              <a:rPr sz="1700" dirty="0">
+                <a:solidFill>
+                  <a:srgbClr val="D8D8F0"/>
+                </a:solidFill>
+                <a:latin typeface="Segoe UI"/>
+              </a:rPr>
+              <a:t> </a:t>
+            </a:r>
+            <a:r>
+              <a:rPr sz="1700" dirty="0" err="1">
+                <a:solidFill>
+                  <a:srgbClr val="D8D8F0"/>
+                </a:solidFill>
+                <a:latin typeface="Segoe UI"/>
+              </a:rPr>
+              <a:t>etadi</a:t>
+            </a:r>
+            <a:endParaRPr sz="1700" dirty="0">
+              <a:solidFill>
+                <a:srgbClr val="D8D8F0"/>
+              </a:solidFill>
+              <a:latin typeface="Segoe UI"/>
+            </a:endParaRPr>
           </a:p>
           <a:p>
             <a:pPr>
@@ -22894,14 +24355,83 @@
               </a:spcAft>
             </a:pPr>
             <a:r>
-              <a:rPr sz="1700">
+              <a:rPr sz="1700" dirty="0">
                 <a:solidFill>
                   <a:srgbClr val="D8D8F0"/>
                 </a:solidFill>
                 <a:latin typeface="Segoe UI"/>
               </a:rPr>
-              <a:t>•  📅 Keyingi ma'ruza: C# tilining amallari</a:t>
-            </a:r>
+              <a:t>•  📅 </a:t>
+            </a:r>
+            <a:r>
+              <a:rPr sz="1700" dirty="0" err="1">
+                <a:solidFill>
+                  <a:srgbClr val="D8D8F0"/>
+                </a:solidFill>
+                <a:latin typeface="Segoe UI"/>
+              </a:rPr>
+              <a:t>Keyingi</a:t>
+            </a:r>
+            <a:r>
+              <a:rPr sz="1700" dirty="0">
+                <a:solidFill>
+                  <a:srgbClr val="D8D8F0"/>
+                </a:solidFill>
+                <a:latin typeface="Segoe UI"/>
+              </a:rPr>
+              <a:t> </a:t>
+            </a:r>
+            <a:r>
+              <a:rPr sz="1700" dirty="0" err="1">
+                <a:solidFill>
+                  <a:srgbClr val="D8D8F0"/>
+                </a:solidFill>
+                <a:latin typeface="Segoe UI"/>
+              </a:rPr>
+              <a:t>ma'ruza</a:t>
+            </a:r>
+            <a:r>
+              <a:rPr sz="1700" dirty="0">
+                <a:solidFill>
+                  <a:srgbClr val="D8D8F0"/>
+                </a:solidFill>
+                <a:latin typeface="Segoe UI"/>
+              </a:rPr>
+              <a:t>: C# </a:t>
+            </a:r>
+            <a:r>
+              <a:rPr sz="1700" dirty="0" err="1">
+                <a:solidFill>
+                  <a:srgbClr val="D8D8F0"/>
+                </a:solidFill>
+                <a:latin typeface="Segoe UI"/>
+              </a:rPr>
+              <a:t>tilining</a:t>
+            </a:r>
+            <a:r>
+              <a:rPr sz="1700" dirty="0">
+                <a:solidFill>
+                  <a:srgbClr val="D8D8F0"/>
+                </a:solidFill>
+                <a:latin typeface="Segoe UI"/>
+              </a:rPr>
+              <a:t> </a:t>
+            </a:r>
+            <a:r>
+              <a:rPr sz="1700" dirty="0" err="1">
+                <a:solidFill>
+                  <a:srgbClr val="D8D8F0"/>
+                </a:solidFill>
+                <a:latin typeface="Segoe UI"/>
+              </a:rPr>
+              <a:t>amallari</a:t>
+            </a:r>
+            <a:endParaRPr sz="1700" dirty="0">
+              <a:solidFill>
+                <a:srgbClr val="D8D8F0"/>
+              </a:solidFill>
+              <a:latin typeface="Segoe UI"/>
+            </a:endParaRPr>
           </a:p>
           <a:p>
             <a:pPr>
@@ -22913,13 +24443,85 @@
               </a:spcAft>
             </a:pPr>
             <a:r>
-              <a:rPr sz="1700">
+              <a:rPr sz="1700" dirty="0">
                 <a:solidFill>
                   <a:srgbClr val="D8D8F0"/>
                 </a:solidFill>
                 <a:latin typeface="Segoe UI"/>
               </a:rPr>
-              <a:t>•  🎯 Faol qatnashganingiz uchun rahmat!</a:t>
+              <a:t>•  🎯 </a:t>
+            </a:r>
+            <a:r>
+              <a:rPr sz="1700" dirty="0" err="1">
+                <a:solidFill>
+                  <a:srgbClr val="D8D8F0"/>
+                </a:solidFill>
+                <a:latin typeface="Segoe UI"/>
+              </a:rPr>
+              <a:t>Faol</a:t>
+            </a:r>
+            <a:r>
+              <a:rPr sz="1700" dirty="0">
+                <a:solidFill>
+                  <a:srgbClr val="D8D8F0"/>
+                </a:solidFill>
+                <a:latin typeface="Segoe UI"/>
+              </a:rPr>
+              <a:t> </a:t>
+            </a:r>
+            <a:r>
+              <a:rPr sz="1700" dirty="0" err="1">
+                <a:solidFill>
+                  <a:srgbClr val="D8D8F0"/>
+                </a:solidFill>
+                <a:latin typeface="Segoe UI"/>
+              </a:rPr>
+              <a:t>qatnashganingiz</a:t>
+            </a:r>
+            <a:r>
+              <a:rPr sz="1700" dirty="0">
+                <a:solidFill>
+                  <a:srgbClr val="D8D8F0"/>
+                </a:solidFill>
+                <a:latin typeface="Segoe UI"/>
+              </a:rPr>
+              <a:t> </a:t>
+            </a:r>
+            <a:r>
+              <a:rPr sz="1700" dirty="0" err="1">
+                <a:solidFill>
+                  <a:srgbClr val="D8D8F0"/>
+                </a:solidFill>
+                <a:latin typeface="Segoe UI"/>
+              </a:rPr>
+              <a:t>uchun</a:t>
+            </a:r>
+            <a:r>
+              <a:rPr sz="1700" dirty="0">
+                <a:solidFill>
+                  <a:srgbClr val="D8D8F0"/>
+                </a:solidFill>
+                <a:latin typeface="Segoe UI"/>
+              </a:rPr>
+              <a:t> </a:t>
+            </a:r>
+            <a:r>
+              <a:rPr sz="1700" dirty="0" err="1">
+                <a:solidFill>
+                  <a:srgbClr val="D8D8F0"/>
+                </a:solidFill>
+                <a:latin typeface="Segoe UI"/>
+              </a:rPr>
+              <a:t>rahmat</a:t>
+            </a:r>
+            <a:r>
+              <a:rPr sz="1700" dirty="0">
+                <a:solidFill>
+                  <a:srgbClr val="D8D8F0"/>
+                </a:solidFill>
+                <a:latin typeface="Segoe UI"/>
+              </a:rPr>
+              <a:t>!</a:t>
             </a:r>
           </a:p>
         </p:txBody>
@@ -23633,15 +25235,93 @@
               </a:lnSpc>
             </a:pPr>
             <a:r>
-              <a:rPr sz="3600" b="1" i="0">
+              <a:rPr sz="3600" b="1" i="0" dirty="0" err="1">
                 <a:solidFill>
                   <a:srgbClr val="FFFFFF"/>
                 </a:solidFill>
                 <a:latin typeface="Segoe UI"/>
               </a:rPr>
-              <a:t>Alifbo, identifikatorlar
-va kalit so'zlar</a:t>
-            </a:r>
+              <a:t>Alifbo</a:t>
+            </a:r>
+            <a:r>
+              <a:rPr sz="3600" b="1" i="0" dirty="0">
+                <a:solidFill>
+                  <a:srgbClr val="FFFFFF"/>
+                </a:solidFill>
+                <a:latin typeface="Segoe UI"/>
+              </a:rPr>
+              <a:t>, </a:t>
+            </a:r>
+            <a:r>
+              <a:rPr sz="3600" b="1" i="0" dirty="0" err="1">
+                <a:solidFill>
+                  <a:srgbClr val="FFFFFF"/>
+                </a:solidFill>
+                <a:latin typeface="Segoe UI"/>
+              </a:rPr>
+              <a:t>identifikatorlar</a:t>
+            </a:r>
+            <a:r>
+              <a:rPr sz="3600" b="1" i="0" dirty="0">
+                <a:solidFill>
+                  <a:srgbClr val="FFFFFF"/>
+                </a:solidFill>
+                <a:latin typeface="Segoe UI"/>
+              </a:rPr>
+              <a:t>
+</a:t>
+            </a:r>
+            <a:r>
+              <a:rPr sz="3600" b="1" i="0" dirty="0" err="1">
+                <a:solidFill>
+                  <a:srgbClr val="FFFFFF"/>
+                </a:solidFill>
+                <a:latin typeface="Segoe UI"/>
+              </a:rPr>
+              <a:t>va</a:t>
+            </a:r>
+            <a:r>
+              <a:rPr sz="3600" b="1" i="0" dirty="0">
+                <a:solidFill>
+                  <a:srgbClr val="FFFFFF"/>
+                </a:solidFill>
+                <a:latin typeface="Segoe UI"/>
+              </a:rPr>
+              <a:t> </a:t>
+            </a:r>
+            <a:r>
+              <a:rPr sz="3600" b="1" i="0" dirty="0" err="1">
+                <a:solidFill>
+                  <a:srgbClr val="FFFFFF"/>
+                </a:solidFill>
+                <a:latin typeface="Segoe UI"/>
+              </a:rPr>
+              <a:t>kalit</a:t>
+            </a:r>
+            <a:r>
+              <a:rPr sz="3600" b="1" i="0" dirty="0">
+                <a:solidFill>
+                  <a:srgbClr val="FFFFFF"/>
+                </a:solidFill>
+                <a:latin typeface="Segoe UI"/>
+              </a:rPr>
+              <a:t> </a:t>
+            </a:r>
+            <a:r>
+              <a:rPr sz="3600" b="1" i="0" dirty="0" err="1">
+                <a:solidFill>
+                  <a:srgbClr val="FFFFFF"/>
+                </a:solidFill>
+                <a:latin typeface="Segoe UI"/>
+              </a:rPr>
+              <a:t>so'zlar</a:t>
+            </a:r>
+            <a:endParaRPr sz="3600" b="1" i="0" dirty="0">
+              <a:solidFill>
+                <a:srgbClr val="FFFFFF"/>
+              </a:solidFill>
+              <a:latin typeface="Segoe UI"/>
+            </a:endParaRPr>
           </a:p>
         </p:txBody>
       </p:sp>
@@ -23654,7 +25334,7 @@
         <p:spPr>
           <a:xfrm>
             <a:off x="3017520" y="3794760"/>
-            <a:ext cx="8503920" cy="822960"/>
+            <a:ext cx="8503920" cy="288605"/>
           </a:xfrm>
           <a:prstGeom prst="rect">
             <a:avLst/>
@@ -23673,13 +25353,212 @@
               </a:lnSpc>
             </a:pPr>
             <a:r>
-              <a:rPr sz="1700" b="0" i="0">
+              <a:rPr sz="1700" b="0" i="0" dirty="0">
                 <a:solidFill>
                   <a:srgbClr val="E8DCFF"/>
                 </a:solidFill>
                 <a:latin typeface="Segoe UI"/>
               </a:rPr>
-              <a:t>C# tilining eng kichik "g'isht"lari — harflar, nomlar va band qilingan so'zlar.</a:t>
+              <a:t>C# </a:t>
+            </a:r>
+            <a:r>
+              <a:rPr sz="1700" b="0" i="0" dirty="0" err="1">
+                <a:solidFill>
+                  <a:srgbClr val="E8DCFF"/>
+                </a:solidFill>
+                <a:latin typeface="Segoe UI"/>
+              </a:rPr>
+              <a:t>tilining</a:t>
+            </a:r>
+            <a:r>
+              <a:rPr sz="1700" b="0" i="0" dirty="0">
+                <a:solidFill>
+                  <a:srgbClr val="E8DCFF"/>
+                </a:solidFill>
+                <a:latin typeface="Segoe UI"/>
+              </a:rPr>
+              <a:t> </a:t>
+            </a:r>
+            <a:r>
+              <a:rPr sz="1700" b="0" i="0" dirty="0" err="1">
+                <a:solidFill>
+                  <a:srgbClr val="E8DCFF"/>
+                </a:solidFill>
+                <a:latin typeface="Segoe UI"/>
+              </a:rPr>
+              <a:t>eng</a:t>
+            </a:r>
+            <a:r>
+              <a:rPr sz="1700" b="0" i="0" dirty="0">
+                <a:solidFill>
+                  <a:srgbClr val="E8DCFF"/>
+                </a:solidFill>
+                <a:latin typeface="Segoe UI"/>
+              </a:rPr>
+              <a:t> </a:t>
+            </a:r>
+            <a:r>
+              <a:rPr sz="1700" b="0" i="0" dirty="0" err="1">
+                <a:solidFill>
+                  <a:srgbClr val="E8DCFF"/>
+                </a:solidFill>
+                <a:latin typeface="Segoe UI"/>
+              </a:rPr>
+              <a:t>kichik</a:t>
+            </a:r>
+            <a:r>
+              <a:rPr sz="1700" b="0" i="0" dirty="0">
+                <a:solidFill>
+                  <a:srgbClr val="E8DCFF"/>
+                </a:solidFill>
+                <a:latin typeface="Segoe UI"/>
+              </a:rPr>
+              <a:t> </a:t>
+            </a:r>
+            <a:r>
+              <a:rPr lang="en-US" altLang="ko-KR" sz="1700" dirty="0">
+                <a:solidFill>
+                  <a:srgbClr val="E8DCFF"/>
+                </a:solidFill>
+                <a:latin typeface="Segoe UI"/>
+              </a:rPr>
+              <a:t>'bricks’</a:t>
+            </a:r>
+            <a:r>
+              <a:rPr lang="en-US" altLang="ko-KR" sz="1600" b="0" i="0" dirty="0">
+                <a:solidFill>
+                  <a:srgbClr val="CCCCCC"/>
+                </a:solidFill>
+                <a:effectLst/>
+                <a:latin typeface="-apple-system"/>
+              </a:rPr>
+              <a:t>(</a:t>
+            </a:r>
+            <a:r>
+              <a:rPr sz="1700" b="0" i="0" dirty="0" err="1">
+                <a:solidFill>
+                  <a:srgbClr val="E8DCFF"/>
+                </a:solidFill>
+                <a:latin typeface="Segoe UI"/>
+              </a:rPr>
+              <a:t>g'isht</a:t>
+            </a:r>
+            <a:r>
+              <a:rPr lang="en-US" sz="1700" b="0" i="0" dirty="0">
+                <a:solidFill>
+                  <a:srgbClr val="E8DCFF"/>
+                </a:solidFill>
+                <a:latin typeface="Segoe UI"/>
+              </a:rPr>
+              <a:t>)</a:t>
+            </a:r>
+            <a:r>
+              <a:rPr sz="1700" b="0" i="0" dirty="0" err="1">
+                <a:solidFill>
+                  <a:srgbClr val="E8DCFF"/>
+                </a:solidFill>
+                <a:latin typeface="Segoe UI"/>
+              </a:rPr>
+              <a:t>lari</a:t>
+            </a:r>
+            <a:r>
+              <a:rPr sz="1700" b="0" i="0" dirty="0">
+                <a:solidFill>
+                  <a:srgbClr val="E8DCFF"/>
+                </a:solidFill>
+                <a:latin typeface="Segoe UI"/>
+              </a:rPr>
+              <a:t> — </a:t>
+            </a:r>
+            <a:r>
+              <a:rPr sz="1700" b="0" i="0" dirty="0" err="1">
+                <a:solidFill>
+                  <a:srgbClr val="E8DCFF"/>
+                </a:solidFill>
+                <a:latin typeface="Segoe UI"/>
+              </a:rPr>
+              <a:t>harflar</a:t>
+            </a:r>
+            <a:r>
+              <a:rPr sz="1700" b="0" i="0" dirty="0">
+                <a:solidFill>
+                  <a:srgbClr val="E8DCFF"/>
+                </a:solidFill>
+                <a:latin typeface="Segoe UI"/>
+              </a:rPr>
+              <a:t>, </a:t>
+            </a:r>
+            <a:r>
+              <a:rPr sz="1700" b="0" i="0" dirty="0" err="1">
+                <a:solidFill>
+                  <a:srgbClr val="E8DCFF"/>
+                </a:solidFill>
+                <a:latin typeface="Segoe UI"/>
+              </a:rPr>
+              <a:t>nomlar</a:t>
+            </a:r>
+            <a:r>
+              <a:rPr sz="1700" b="0" i="0" dirty="0">
+                <a:solidFill>
+                  <a:srgbClr val="E8DCFF"/>
+                </a:solidFill>
+                <a:latin typeface="Segoe UI"/>
+              </a:rPr>
+              <a:t> </a:t>
+            </a:r>
+            <a:r>
+              <a:rPr sz="1700" b="0" i="0" dirty="0" err="1">
+                <a:solidFill>
+                  <a:srgbClr val="E8DCFF"/>
+                </a:solidFill>
+                <a:latin typeface="Segoe UI"/>
+              </a:rPr>
+              <a:t>va</a:t>
+            </a:r>
+            <a:r>
+              <a:rPr sz="1700" b="0" i="0" dirty="0">
+                <a:solidFill>
+                  <a:srgbClr val="E8DCFF"/>
+                </a:solidFill>
+                <a:latin typeface="Segoe UI"/>
+              </a:rPr>
+              <a:t> band </a:t>
+            </a:r>
+            <a:r>
+              <a:rPr sz="1700" b="0" i="0" dirty="0" err="1">
+                <a:solidFill>
+                  <a:srgbClr val="E8DCFF"/>
+                </a:solidFill>
+                <a:latin typeface="Segoe UI"/>
+              </a:rPr>
+              <a:t>qilingan</a:t>
+            </a:r>
+            <a:r>
+              <a:rPr sz="1700" b="0" i="0" dirty="0">
+                <a:solidFill>
+                  <a:srgbClr val="E8DCFF"/>
+                </a:solidFill>
+                <a:latin typeface="Segoe UI"/>
+              </a:rPr>
+              <a:t> </a:t>
+            </a:r>
+            <a:r>
+              <a:rPr sz="1700" b="0" i="0" dirty="0" err="1">
+                <a:solidFill>
+                  <a:srgbClr val="E8DCFF"/>
+                </a:solidFill>
+                <a:latin typeface="Segoe UI"/>
+              </a:rPr>
+              <a:t>so'zlar</a:t>
+            </a:r>
+            <a:r>
+              <a:rPr sz="1700" b="0" i="0" dirty="0">
+                <a:solidFill>
+                  <a:srgbClr val="E8DCFF"/>
+                </a:solidFill>
+                <a:latin typeface="Segoe UI"/>
+              </a:rPr>
+              <a:t>.</a:t>
             </a:r>
           </a:p>
         </p:txBody>
@@ -23992,13 +25871,247 @@
               </a:spcAft>
             </a:pPr>
             <a:r>
-              <a:rPr sz="1800">
+              <a:rPr sz="1800" dirty="0">
                 <a:solidFill>
                   <a:srgbClr val="23232B"/>
                 </a:solidFill>
                 <a:latin typeface="Segoe UI"/>
               </a:rPr>
-              <a:t>•  Har qanday til (shu jumladan dasturlash tili ham) o'z "alifbosi" — ruxsat etilgan belgilar to'plamiga ega.</a:t>
+              <a:t>•  Har </a:t>
+            </a:r>
+            <a:r>
+              <a:rPr sz="1800" dirty="0" err="1">
+                <a:solidFill>
+                  <a:srgbClr val="23232B"/>
+                </a:solidFill>
+                <a:latin typeface="Segoe UI"/>
+              </a:rPr>
+              <a:t>qanday</a:t>
+            </a:r>
+            <a:r>
+              <a:rPr sz="1800" dirty="0">
+                <a:solidFill>
+                  <a:srgbClr val="23232B"/>
+                </a:solidFill>
+                <a:latin typeface="Segoe UI"/>
+              </a:rPr>
+              <a:t> </a:t>
+            </a:r>
+            <a:r>
+              <a:rPr sz="1800" dirty="0" err="1">
+                <a:solidFill>
+                  <a:srgbClr val="23232B"/>
+                </a:solidFill>
+                <a:latin typeface="Segoe UI"/>
+              </a:rPr>
+              <a:t>til</a:t>
+            </a:r>
+            <a:r>
+              <a:rPr sz="1800" dirty="0">
+                <a:solidFill>
+                  <a:srgbClr val="23232B"/>
+                </a:solidFill>
+                <a:latin typeface="Segoe UI"/>
+              </a:rPr>
+              <a:t> (</a:t>
+            </a:r>
+            <a:r>
+              <a:rPr sz="1800" dirty="0" err="1">
+                <a:solidFill>
+                  <a:srgbClr val="23232B"/>
+                </a:solidFill>
+                <a:latin typeface="Segoe UI"/>
+              </a:rPr>
+              <a:t>shu</a:t>
+            </a:r>
+            <a:r>
+              <a:rPr sz="1800" dirty="0">
+                <a:solidFill>
+                  <a:srgbClr val="23232B"/>
+                </a:solidFill>
+                <a:latin typeface="Segoe UI"/>
+              </a:rPr>
+              <a:t> </a:t>
+            </a:r>
+            <a:r>
+              <a:rPr sz="1800" dirty="0" err="1">
+                <a:solidFill>
+                  <a:srgbClr val="23232B"/>
+                </a:solidFill>
+                <a:latin typeface="Segoe UI"/>
+              </a:rPr>
+              <a:t>jumladan</a:t>
+            </a:r>
+            <a:r>
+              <a:rPr sz="1800" dirty="0">
+                <a:solidFill>
+                  <a:srgbClr val="23232B"/>
+                </a:solidFill>
+                <a:latin typeface="Segoe UI"/>
+              </a:rPr>
+              <a:t> </a:t>
+            </a:r>
+            <a:r>
+              <a:rPr sz="1800" dirty="0" err="1">
+                <a:solidFill>
+                  <a:srgbClr val="23232B"/>
+                </a:solidFill>
+                <a:latin typeface="Segoe UI"/>
+              </a:rPr>
+              <a:t>dasturlash</a:t>
+            </a:r>
+            <a:r>
+              <a:rPr sz="1800" dirty="0">
+                <a:solidFill>
+                  <a:srgbClr val="23232B"/>
+                </a:solidFill>
+                <a:latin typeface="Segoe UI"/>
+              </a:rPr>
+              <a:t> </a:t>
+            </a:r>
+            <a:r>
+              <a:rPr sz="1800" dirty="0" err="1">
+                <a:solidFill>
+                  <a:srgbClr val="23232B"/>
+                </a:solidFill>
+                <a:latin typeface="Segoe UI"/>
+              </a:rPr>
+              <a:t>tili</a:t>
+            </a:r>
+            <a:r>
+              <a:rPr sz="1800" dirty="0">
+                <a:solidFill>
+                  <a:srgbClr val="23232B"/>
+                </a:solidFill>
+                <a:latin typeface="Segoe UI"/>
+              </a:rPr>
+              <a:t> ham) </a:t>
+            </a:r>
+            <a:r>
+              <a:rPr sz="1800" dirty="0" err="1">
+                <a:solidFill>
+                  <a:srgbClr val="23232B"/>
+                </a:solidFill>
+                <a:latin typeface="Segoe UI"/>
+              </a:rPr>
+              <a:t>o'z</a:t>
+            </a:r>
+            <a:r>
+              <a:rPr sz="1800" dirty="0">
+                <a:solidFill>
+                  <a:srgbClr val="23232B"/>
+                </a:solidFill>
+                <a:latin typeface="Segoe UI"/>
+              </a:rPr>
+              <a:t> "</a:t>
+            </a:r>
+            <a:r>
+              <a:rPr sz="1800" dirty="0" err="1">
+                <a:solidFill>
+                  <a:srgbClr val="23232B"/>
+                </a:solidFill>
+                <a:latin typeface="Segoe UI"/>
+              </a:rPr>
+              <a:t>alifbosi</a:t>
+            </a:r>
+            <a:r>
+              <a:rPr sz="1800" dirty="0">
+                <a:solidFill>
+                  <a:srgbClr val="23232B"/>
+                </a:solidFill>
+                <a:latin typeface="Segoe UI"/>
+              </a:rPr>
+              <a:t>" — </a:t>
+            </a:r>
+            <a:r>
+              <a:rPr sz="1800" dirty="0" err="1">
+                <a:solidFill>
+                  <a:srgbClr val="23232B"/>
+                </a:solidFill>
+                <a:latin typeface="Segoe UI"/>
+              </a:rPr>
+              <a:t>ruxsat</a:t>
+            </a:r>
+            <a:r>
+              <a:rPr sz="1800" dirty="0">
+                <a:solidFill>
+                  <a:srgbClr val="23232B"/>
+                </a:solidFill>
+                <a:latin typeface="Segoe UI"/>
+              </a:rPr>
+              <a:t> </a:t>
+            </a:r>
+            <a:r>
+              <a:rPr sz="1800" dirty="0" err="1">
+                <a:solidFill>
+                  <a:srgbClr val="23232B"/>
+                </a:solidFill>
+                <a:latin typeface="Segoe UI"/>
+              </a:rPr>
+              <a:t>etilgan</a:t>
+            </a:r>
+            <a:r>
+              <a:rPr sz="1800" dirty="0">
+                <a:solidFill>
+                  <a:srgbClr val="23232B"/>
+                </a:solidFill>
+                <a:latin typeface="Segoe UI"/>
+              </a:rPr>
+              <a:t> </a:t>
+            </a:r>
+            <a:r>
+              <a:rPr sz="1800" dirty="0" err="1">
+                <a:solidFill>
+                  <a:srgbClr val="23232B"/>
+                </a:solidFill>
+                <a:latin typeface="Segoe UI"/>
+              </a:rPr>
+              <a:t>belgilar</a:t>
+            </a:r>
+            <a:r>
+              <a:rPr sz="1800" dirty="0">
+                <a:solidFill>
+                  <a:srgbClr val="23232B"/>
+                </a:solidFill>
+                <a:latin typeface="Segoe UI"/>
+              </a:rPr>
+              <a:t> </a:t>
+            </a:r>
+            <a:r>
+              <a:rPr sz="1800" dirty="0" err="1">
+                <a:solidFill>
+                  <a:srgbClr val="23232B"/>
+                </a:solidFill>
+                <a:latin typeface="Segoe UI"/>
+              </a:rPr>
+              <a:t>to'plamiga</a:t>
+            </a:r>
+            <a:r>
+              <a:rPr sz="1800" dirty="0">
+                <a:solidFill>
+                  <a:srgbClr val="23232B"/>
+                </a:solidFill>
+                <a:latin typeface="Segoe UI"/>
+              </a:rPr>
+              <a:t> </a:t>
+            </a:r>
+            <a:r>
+              <a:rPr sz="1800" dirty="0" err="1">
+                <a:solidFill>
+                  <a:srgbClr val="23232B"/>
+                </a:solidFill>
+                <a:latin typeface="Segoe UI"/>
+              </a:rPr>
+              <a:t>ega</a:t>
+            </a:r>
+            <a:r>
+              <a:rPr sz="1800" dirty="0">
+                <a:solidFill>
+                  <a:srgbClr val="23232B"/>
+                </a:solidFill>
+                <a:latin typeface="Segoe UI"/>
+              </a:rPr>
+              <a:t>.</a:t>
             </a:r>
           </a:p>
           <a:p>
@@ -24011,13 +26124,319 @@
               </a:spcAft>
             </a:pPr>
             <a:r>
-              <a:rPr sz="1800">
+              <a:rPr sz="1800" dirty="0">
                 <a:solidFill>
                   <a:srgbClr val="23232B"/>
                 </a:solidFill>
                 <a:latin typeface="Segoe UI"/>
               </a:rPr>
-              <a:t>•  C# kodini yozishda foydalanish mumkin bo'lgan asosiy belgilar: lotin harflari (A-Z, a-z), raqamlar (0-9), pastki chiziq ( _ ) va maxsus belgilar ( { } ( ) ; , . " ' + - * / va h.k.).</a:t>
+              <a:t>•  C# </a:t>
+            </a:r>
+            <a:r>
+              <a:rPr sz="1800" dirty="0" err="1">
+                <a:solidFill>
+                  <a:srgbClr val="23232B"/>
+                </a:solidFill>
+                <a:latin typeface="Segoe UI"/>
+              </a:rPr>
+              <a:t>kodini</a:t>
+            </a:r>
+            <a:r>
+              <a:rPr sz="1800" dirty="0">
+                <a:solidFill>
+                  <a:srgbClr val="23232B"/>
+                </a:solidFill>
+                <a:latin typeface="Segoe UI"/>
+              </a:rPr>
+              <a:t> </a:t>
+            </a:r>
+            <a:r>
+              <a:rPr sz="1800" dirty="0" err="1">
+                <a:solidFill>
+                  <a:srgbClr val="23232B"/>
+                </a:solidFill>
+                <a:latin typeface="Segoe UI"/>
+              </a:rPr>
+              <a:t>yozishda</a:t>
+            </a:r>
+            <a:r>
+              <a:rPr sz="1800" dirty="0">
+                <a:solidFill>
+                  <a:srgbClr val="23232B"/>
+                </a:solidFill>
+                <a:latin typeface="Segoe UI"/>
+              </a:rPr>
+              <a:t> </a:t>
+            </a:r>
+            <a:r>
+              <a:rPr sz="1800" dirty="0" err="1">
+                <a:solidFill>
+                  <a:srgbClr val="23232B"/>
+                </a:solidFill>
+                <a:latin typeface="Segoe UI"/>
+              </a:rPr>
+              <a:t>foydalanish</a:t>
+            </a:r>
+            <a:r>
+              <a:rPr sz="1800" dirty="0">
+                <a:solidFill>
+                  <a:srgbClr val="23232B"/>
+                </a:solidFill>
+                <a:latin typeface="Segoe UI"/>
+              </a:rPr>
+              <a:t> </a:t>
+            </a:r>
+            <a:r>
+              <a:rPr sz="1800" dirty="0" err="1">
+                <a:solidFill>
+                  <a:srgbClr val="23232B"/>
+                </a:solidFill>
+                <a:latin typeface="Segoe UI"/>
+              </a:rPr>
+              <a:t>mumkin</a:t>
+            </a:r>
+            <a:r>
+              <a:rPr sz="1800" dirty="0">
+                <a:solidFill>
+                  <a:srgbClr val="23232B"/>
+                </a:solidFill>
+                <a:latin typeface="Segoe UI"/>
+              </a:rPr>
+              <a:t> </a:t>
+            </a:r>
+            <a:r>
+              <a:rPr sz="1800" dirty="0" err="1">
+                <a:solidFill>
+                  <a:srgbClr val="23232B"/>
+                </a:solidFill>
+                <a:latin typeface="Segoe UI"/>
+              </a:rPr>
+              <a:t>bo'lgan</a:t>
+            </a:r>
+            <a:r>
+              <a:rPr sz="1800" dirty="0">
+                <a:solidFill>
+                  <a:srgbClr val="23232B"/>
+                </a:solidFill>
+                <a:latin typeface="Segoe UI"/>
+              </a:rPr>
+              <a:t> </a:t>
+            </a:r>
+            <a:r>
+              <a:rPr sz="1800" dirty="0" err="1">
+                <a:solidFill>
+                  <a:srgbClr val="23232B"/>
+                </a:solidFill>
+                <a:latin typeface="Segoe UI"/>
+              </a:rPr>
+              <a:t>asosiy</a:t>
+            </a:r>
+            <a:r>
+              <a:rPr sz="1800" dirty="0">
+                <a:solidFill>
+                  <a:srgbClr val="23232B"/>
+                </a:solidFill>
+                <a:latin typeface="Segoe UI"/>
+              </a:rPr>
+              <a:t> </a:t>
+            </a:r>
+            <a:r>
+              <a:rPr sz="1800" dirty="0" err="1">
+                <a:solidFill>
+                  <a:srgbClr val="23232B"/>
+                </a:solidFill>
+                <a:latin typeface="Segoe UI"/>
+              </a:rPr>
+              <a:t>belgilar</a:t>
+            </a:r>
+            <a:r>
+              <a:rPr sz="1800" dirty="0">
+                <a:solidFill>
+                  <a:srgbClr val="23232B"/>
+                </a:solidFill>
+                <a:latin typeface="Segoe UI"/>
+              </a:rPr>
+              <a:t>: </a:t>
+            </a:r>
+            <a:r>
+              <a:rPr sz="1800" dirty="0" err="1">
+                <a:solidFill>
+                  <a:srgbClr val="23232B"/>
+                </a:solidFill>
+                <a:latin typeface="Segoe UI"/>
+              </a:rPr>
+              <a:t>lotin</a:t>
+            </a:r>
+            <a:r>
+              <a:rPr sz="1800" dirty="0">
+                <a:solidFill>
+                  <a:srgbClr val="23232B"/>
+                </a:solidFill>
+                <a:latin typeface="Segoe UI"/>
+              </a:rPr>
+              <a:t> </a:t>
+            </a:r>
+            <a:r>
+              <a:rPr sz="1800" dirty="0" err="1">
+                <a:solidFill>
+                  <a:srgbClr val="23232B"/>
+                </a:solidFill>
+                <a:latin typeface="Segoe UI"/>
+              </a:rPr>
+              <a:t>harflari</a:t>
+            </a:r>
+            <a:r>
+              <a:rPr sz="1800" dirty="0">
+                <a:solidFill>
+                  <a:srgbClr val="23232B"/>
+                </a:solidFill>
+                <a:latin typeface="Segoe UI"/>
+              </a:rPr>
+              <a:t> (A-Z, a-z), </a:t>
+            </a:r>
+            <a:r>
+              <a:rPr sz="1800" dirty="0" err="1">
+                <a:solidFill>
+                  <a:srgbClr val="23232B"/>
+                </a:solidFill>
+                <a:latin typeface="Segoe UI"/>
+              </a:rPr>
+              <a:t>raqamlar</a:t>
+            </a:r>
+            <a:r>
+              <a:rPr sz="1800" dirty="0">
+                <a:solidFill>
+                  <a:srgbClr val="23232B"/>
+                </a:solidFill>
+                <a:latin typeface="Segoe UI"/>
+              </a:rPr>
+              <a:t> (0-9), </a:t>
+            </a:r>
+            <a:r>
+              <a:rPr sz="1800" dirty="0" err="1">
+                <a:solidFill>
+                  <a:srgbClr val="23232B"/>
+                </a:solidFill>
+                <a:latin typeface="Segoe UI"/>
+              </a:rPr>
+              <a:t>pastki</a:t>
+            </a:r>
+            <a:r>
+              <a:rPr sz="1800" dirty="0">
+                <a:solidFill>
+                  <a:srgbClr val="23232B"/>
+                </a:solidFill>
+                <a:latin typeface="Segoe UI"/>
+              </a:rPr>
+              <a:t> </a:t>
+            </a:r>
+            <a:r>
+              <a:rPr sz="1800" dirty="0" err="1">
+                <a:solidFill>
+                  <a:srgbClr val="23232B"/>
+                </a:solidFill>
+                <a:latin typeface="Segoe UI"/>
+              </a:rPr>
+              <a:t>chiziq</a:t>
+            </a:r>
+            <a:r>
+              <a:rPr sz="1800" dirty="0">
+                <a:solidFill>
+                  <a:srgbClr val="23232B"/>
+                </a:solidFill>
+                <a:latin typeface="Segoe UI"/>
+              </a:rPr>
+              <a:t> ( _ ) </a:t>
+            </a:r>
+            <a:r>
+              <a:rPr sz="1800" dirty="0" err="1">
+                <a:solidFill>
+                  <a:srgbClr val="23232B"/>
+                </a:solidFill>
+                <a:latin typeface="Segoe UI"/>
+              </a:rPr>
+              <a:t>va</a:t>
+            </a:r>
+            <a:r>
+              <a:rPr sz="1800" dirty="0">
+                <a:solidFill>
+                  <a:srgbClr val="23232B"/>
+                </a:solidFill>
+                <a:latin typeface="Segoe UI"/>
+              </a:rPr>
+              <a:t> </a:t>
+            </a:r>
+            <a:r>
+              <a:rPr sz="1800" dirty="0" err="1">
+                <a:solidFill>
+                  <a:srgbClr val="23232B"/>
+                </a:solidFill>
+                <a:latin typeface="Segoe UI"/>
+              </a:rPr>
+              <a:t>maxsus</a:t>
+            </a:r>
+            <a:r>
+              <a:rPr sz="1800" dirty="0">
+                <a:solidFill>
+                  <a:srgbClr val="23232B"/>
+                </a:solidFill>
+                <a:latin typeface="Segoe UI"/>
+              </a:rPr>
+              <a:t> </a:t>
+            </a:r>
+            <a:r>
+              <a:rPr sz="1800" dirty="0" err="1">
+                <a:solidFill>
+                  <a:srgbClr val="23232B"/>
+                </a:solidFill>
+                <a:latin typeface="Segoe UI"/>
+              </a:rPr>
+              <a:t>belgilar</a:t>
+            </a:r>
+            <a:r>
+              <a:rPr sz="1800" dirty="0">
+                <a:solidFill>
+                  <a:srgbClr val="23232B"/>
+                </a:solidFill>
+                <a:latin typeface="Segoe UI"/>
+              </a:rPr>
+              <a:t> ( { } ( ) ; , . " ' + - * / </a:t>
+            </a:r>
+            <a:r>
+              <a:rPr sz="1800" dirty="0" err="1">
+                <a:solidFill>
+                  <a:srgbClr val="23232B"/>
+                </a:solidFill>
+                <a:latin typeface="Segoe UI"/>
+              </a:rPr>
+              <a:t>va</a:t>
+            </a:r>
+            <a:r>
+              <a:rPr sz="1800" dirty="0">
+                <a:solidFill>
+                  <a:srgbClr val="23232B"/>
+                </a:solidFill>
+                <a:latin typeface="Segoe UI"/>
+              </a:rPr>
+              <a:t> </a:t>
+            </a:r>
+            <a:r>
+              <a:rPr sz="1800" dirty="0" err="1">
+                <a:solidFill>
+                  <a:srgbClr val="23232B"/>
+                </a:solidFill>
+                <a:latin typeface="Segoe UI"/>
+              </a:rPr>
+              <a:t>h.k.</a:t>
+            </a:r>
+            <a:r>
+              <a:rPr sz="1800" dirty="0">
+                <a:solidFill>
+                  <a:srgbClr val="23232B"/>
+                </a:solidFill>
+                <a:latin typeface="Segoe UI"/>
+              </a:rPr>
+              <a:t>).</a:t>
             </a:r>
           </a:p>
           <a:p>
@@ -24030,13 +26449,319 @@
               </a:spcAft>
             </a:pPr>
             <a:r>
-              <a:rPr sz="1800">
+              <a:rPr sz="1800" dirty="0">
                 <a:solidFill>
                   <a:srgbClr val="23232B"/>
                 </a:solidFill>
                 <a:latin typeface="Segoe UI"/>
               </a:rPr>
-              <a:t>•  C# Unicode'ni qo'llab-quvvatlaydi — nazariy jihatdan o'zbekcha yoki boshqa harflar bilan ham nom yozish mumkin, lekin xalqaro amaliyotda DOIM lotin harflaridan foydalaniladi.</a:t>
+              <a:t>•  C# </a:t>
+            </a:r>
+            <a:r>
+              <a:rPr sz="1800" dirty="0" err="1">
+                <a:solidFill>
+                  <a:srgbClr val="23232B"/>
+                </a:solidFill>
+                <a:latin typeface="Segoe UI"/>
+              </a:rPr>
+              <a:t>Unicode'ni</a:t>
+            </a:r>
+            <a:r>
+              <a:rPr sz="1800" dirty="0">
+                <a:solidFill>
+                  <a:srgbClr val="23232B"/>
+                </a:solidFill>
+                <a:latin typeface="Segoe UI"/>
+              </a:rPr>
+              <a:t> </a:t>
+            </a:r>
+            <a:r>
+              <a:rPr sz="1800" dirty="0" err="1">
+                <a:solidFill>
+                  <a:srgbClr val="23232B"/>
+                </a:solidFill>
+                <a:latin typeface="Segoe UI"/>
+              </a:rPr>
+              <a:t>qo'llab-quvvatlaydi</a:t>
+            </a:r>
+            <a:r>
+              <a:rPr sz="1800" dirty="0">
+                <a:solidFill>
+                  <a:srgbClr val="23232B"/>
+                </a:solidFill>
+                <a:latin typeface="Segoe UI"/>
+              </a:rPr>
+              <a:t> — </a:t>
+            </a:r>
+            <a:r>
+              <a:rPr sz="1800" dirty="0" err="1">
+                <a:solidFill>
+                  <a:srgbClr val="23232B"/>
+                </a:solidFill>
+                <a:latin typeface="Segoe UI"/>
+              </a:rPr>
+              <a:t>nazariy</a:t>
+            </a:r>
+            <a:r>
+              <a:rPr sz="1800" dirty="0">
+                <a:solidFill>
+                  <a:srgbClr val="23232B"/>
+                </a:solidFill>
+                <a:latin typeface="Segoe UI"/>
+              </a:rPr>
+              <a:t> </a:t>
+            </a:r>
+            <a:r>
+              <a:rPr sz="1800" dirty="0" err="1">
+                <a:solidFill>
+                  <a:srgbClr val="23232B"/>
+                </a:solidFill>
+                <a:latin typeface="Segoe UI"/>
+              </a:rPr>
+              <a:t>jihatdan</a:t>
+            </a:r>
+            <a:r>
+              <a:rPr sz="1800" dirty="0">
+                <a:solidFill>
+                  <a:srgbClr val="23232B"/>
+                </a:solidFill>
+                <a:latin typeface="Segoe UI"/>
+              </a:rPr>
+              <a:t> </a:t>
+            </a:r>
+            <a:r>
+              <a:rPr sz="1800" dirty="0" err="1">
+                <a:solidFill>
+                  <a:srgbClr val="23232B"/>
+                </a:solidFill>
+                <a:latin typeface="Segoe UI"/>
+              </a:rPr>
+              <a:t>o'zbekcha</a:t>
+            </a:r>
+            <a:r>
+              <a:rPr sz="1800" dirty="0">
+                <a:solidFill>
+                  <a:srgbClr val="23232B"/>
+                </a:solidFill>
+                <a:latin typeface="Segoe UI"/>
+              </a:rPr>
+              <a:t> </a:t>
+            </a:r>
+            <a:r>
+              <a:rPr sz="1800" dirty="0" err="1">
+                <a:solidFill>
+                  <a:srgbClr val="23232B"/>
+                </a:solidFill>
+                <a:latin typeface="Segoe UI"/>
+              </a:rPr>
+              <a:t>yoki</a:t>
+            </a:r>
+            <a:r>
+              <a:rPr sz="1800" dirty="0">
+                <a:solidFill>
+                  <a:srgbClr val="23232B"/>
+                </a:solidFill>
+                <a:latin typeface="Segoe UI"/>
+              </a:rPr>
+              <a:t> </a:t>
+            </a:r>
+            <a:r>
+              <a:rPr sz="1800" dirty="0" err="1">
+                <a:solidFill>
+                  <a:srgbClr val="23232B"/>
+                </a:solidFill>
+                <a:latin typeface="Segoe UI"/>
+              </a:rPr>
+              <a:t>boshqa</a:t>
+            </a:r>
+            <a:r>
+              <a:rPr sz="1800" dirty="0">
+                <a:solidFill>
+                  <a:srgbClr val="23232B"/>
+                </a:solidFill>
+                <a:latin typeface="Segoe UI"/>
+              </a:rPr>
+              <a:t> </a:t>
+            </a:r>
+            <a:r>
+              <a:rPr sz="1800" dirty="0" err="1">
+                <a:solidFill>
+                  <a:srgbClr val="23232B"/>
+                </a:solidFill>
+                <a:latin typeface="Segoe UI"/>
+              </a:rPr>
+              <a:t>harflar</a:t>
+            </a:r>
+            <a:r>
+              <a:rPr sz="1800" dirty="0">
+                <a:solidFill>
+                  <a:srgbClr val="23232B"/>
+                </a:solidFill>
+                <a:latin typeface="Segoe UI"/>
+              </a:rPr>
+              <a:t> </a:t>
+            </a:r>
+            <a:r>
+              <a:rPr sz="1800" dirty="0" err="1">
+                <a:solidFill>
+                  <a:srgbClr val="23232B"/>
+                </a:solidFill>
+                <a:latin typeface="Segoe UI"/>
+              </a:rPr>
+              <a:t>bilan</a:t>
+            </a:r>
+            <a:r>
+              <a:rPr sz="1800" dirty="0">
+                <a:solidFill>
+                  <a:srgbClr val="23232B"/>
+                </a:solidFill>
+                <a:latin typeface="Segoe UI"/>
+              </a:rPr>
+              <a:t> ham nom </a:t>
+            </a:r>
+            <a:r>
+              <a:rPr sz="1800" dirty="0" err="1">
+                <a:solidFill>
+                  <a:srgbClr val="23232B"/>
+                </a:solidFill>
+                <a:latin typeface="Segoe UI"/>
+              </a:rPr>
+              <a:t>yozish</a:t>
+            </a:r>
+            <a:r>
+              <a:rPr sz="1800" dirty="0">
+                <a:solidFill>
+                  <a:srgbClr val="23232B"/>
+                </a:solidFill>
+                <a:latin typeface="Segoe UI"/>
+              </a:rPr>
+              <a:t> </a:t>
+            </a:r>
+            <a:r>
+              <a:rPr sz="1800" dirty="0" err="1">
+                <a:solidFill>
+                  <a:srgbClr val="23232B"/>
+                </a:solidFill>
+                <a:latin typeface="Segoe UI"/>
+              </a:rPr>
+              <a:t>mumkin</a:t>
+            </a:r>
+            <a:r>
+              <a:rPr sz="1800" dirty="0">
+                <a:solidFill>
+                  <a:srgbClr val="23232B"/>
+                </a:solidFill>
+                <a:latin typeface="Segoe UI"/>
+              </a:rPr>
+              <a:t>, </a:t>
+            </a:r>
+            <a:r>
+              <a:rPr sz="1800" dirty="0" err="1">
+                <a:solidFill>
+                  <a:srgbClr val="23232B"/>
+                </a:solidFill>
+                <a:latin typeface="Segoe UI"/>
+              </a:rPr>
+              <a:t>lekin</a:t>
+            </a:r>
+            <a:r>
+              <a:rPr sz="1800" dirty="0">
+                <a:solidFill>
+                  <a:srgbClr val="23232B"/>
+                </a:solidFill>
+                <a:latin typeface="Segoe UI"/>
+              </a:rPr>
+              <a:t> </a:t>
+            </a:r>
+            <a:r>
+              <a:rPr sz="1800" dirty="0" err="1">
+                <a:solidFill>
+                  <a:srgbClr val="23232B"/>
+                </a:solidFill>
+                <a:latin typeface="Segoe UI"/>
+              </a:rPr>
+              <a:t>xalqaro</a:t>
+            </a:r>
+            <a:r>
+              <a:rPr sz="1800" dirty="0">
+                <a:solidFill>
+                  <a:srgbClr val="23232B"/>
+                </a:solidFill>
+                <a:latin typeface="Segoe UI"/>
+              </a:rPr>
+              <a:t> </a:t>
+            </a:r>
+            <a:r>
+              <a:rPr sz="1800" dirty="0" err="1">
+                <a:solidFill>
+                  <a:srgbClr val="23232B"/>
+                </a:solidFill>
+                <a:latin typeface="Segoe UI"/>
+              </a:rPr>
+              <a:t>amaliyotda</a:t>
+            </a:r>
+            <a:r>
+              <a:rPr sz="1800" dirty="0">
+                <a:solidFill>
+                  <a:srgbClr val="23232B"/>
+                </a:solidFill>
+                <a:latin typeface="Segoe UI"/>
+              </a:rPr>
+              <a:t> DOIM </a:t>
+            </a:r>
+            <a:r>
+              <a:rPr sz="1800" dirty="0" err="1">
+                <a:solidFill>
+                  <a:srgbClr val="23232B"/>
+                </a:solidFill>
+                <a:latin typeface="Segoe UI"/>
+              </a:rPr>
+              <a:t>lotin</a:t>
+            </a:r>
+            <a:r>
+              <a:rPr sz="1800" dirty="0">
+                <a:solidFill>
+                  <a:srgbClr val="23232B"/>
+                </a:solidFill>
+                <a:latin typeface="Segoe UI"/>
+              </a:rPr>
+              <a:t> </a:t>
+            </a:r>
+            <a:r>
+              <a:rPr sz="1800" dirty="0" err="1">
+                <a:solidFill>
+                  <a:srgbClr val="23232B"/>
+                </a:solidFill>
+                <a:latin typeface="Segoe UI"/>
+              </a:rPr>
+              <a:t>harflaridan</a:t>
+            </a:r>
+            <a:r>
+              <a:rPr sz="1800" dirty="0">
+                <a:solidFill>
+                  <a:srgbClr val="23232B"/>
+                </a:solidFill>
+                <a:latin typeface="Segoe UI"/>
+              </a:rPr>
+              <a:t> </a:t>
+            </a:r>
+            <a:r>
+              <a:rPr sz="1800" dirty="0" err="1">
+                <a:solidFill>
+                  <a:srgbClr val="23232B"/>
+                </a:solidFill>
+                <a:latin typeface="Segoe UI"/>
+              </a:rPr>
+              <a:t>foydalaniladi</a:t>
+            </a:r>
+            <a:r>
+              <a:rPr sz="1800" dirty="0">
+                <a:solidFill>
+                  <a:srgbClr val="23232B"/>
+                </a:solidFill>
+                <a:latin typeface="Segoe UI"/>
+              </a:rPr>
+              <a:t>.</a:t>
             </a:r>
           </a:p>
           <a:p>
@@ -24049,13 +26774,247 @@
               </a:spcAft>
             </a:pPr>
             <a:r>
-              <a:rPr sz="1800">
+              <a:rPr sz="1800" dirty="0">
                 <a:solidFill>
                   <a:srgbClr val="23232B"/>
                 </a:solidFill>
                 <a:latin typeface="Segoe UI"/>
               </a:rPr>
-              <a:t>•  Bo'sh joy (probel) va ba'zi maxsus belgilar identifikator (nom) ichida ishlatilmaydi — buni keyingi slaydda ko'ramiz.</a:t>
+              <a:t>•  </a:t>
+            </a:r>
+            <a:r>
+              <a:rPr sz="1800" dirty="0" err="1">
+                <a:solidFill>
+                  <a:srgbClr val="23232B"/>
+                </a:solidFill>
+                <a:latin typeface="Segoe UI"/>
+              </a:rPr>
+              <a:t>Bo'sh</a:t>
+            </a:r>
+            <a:r>
+              <a:rPr sz="1800" dirty="0">
+                <a:solidFill>
+                  <a:srgbClr val="23232B"/>
+                </a:solidFill>
+                <a:latin typeface="Segoe UI"/>
+              </a:rPr>
+              <a:t> joy (</a:t>
+            </a:r>
+            <a:r>
+              <a:rPr sz="1800" dirty="0" err="1">
+                <a:solidFill>
+                  <a:srgbClr val="23232B"/>
+                </a:solidFill>
+                <a:latin typeface="Segoe UI"/>
+              </a:rPr>
+              <a:t>probel</a:t>
+            </a:r>
+            <a:r>
+              <a:rPr sz="1800" dirty="0">
+                <a:solidFill>
+                  <a:srgbClr val="23232B"/>
+                </a:solidFill>
+                <a:latin typeface="Segoe UI"/>
+              </a:rPr>
+              <a:t>) </a:t>
+            </a:r>
+            <a:r>
+              <a:rPr sz="1800" dirty="0" err="1">
+                <a:solidFill>
+                  <a:srgbClr val="23232B"/>
+                </a:solidFill>
+                <a:latin typeface="Segoe UI"/>
+              </a:rPr>
+              <a:t>va</a:t>
+            </a:r>
+            <a:r>
+              <a:rPr sz="1800" dirty="0">
+                <a:solidFill>
+                  <a:srgbClr val="23232B"/>
+                </a:solidFill>
+                <a:latin typeface="Segoe UI"/>
+              </a:rPr>
+              <a:t> </a:t>
+            </a:r>
+            <a:r>
+              <a:rPr sz="1800" dirty="0" err="1">
+                <a:solidFill>
+                  <a:srgbClr val="23232B"/>
+                </a:solidFill>
+                <a:latin typeface="Segoe UI"/>
+              </a:rPr>
+              <a:t>ba'zi</a:t>
+            </a:r>
+            <a:r>
+              <a:rPr sz="1800" dirty="0">
+                <a:solidFill>
+                  <a:srgbClr val="23232B"/>
+                </a:solidFill>
+                <a:latin typeface="Segoe UI"/>
+              </a:rPr>
+              <a:t> </a:t>
+            </a:r>
+            <a:r>
+              <a:rPr sz="1800" dirty="0" err="1">
+                <a:solidFill>
+                  <a:srgbClr val="23232B"/>
+                </a:solidFill>
+                <a:latin typeface="Segoe UI"/>
+              </a:rPr>
+              <a:t>maxsus</a:t>
+            </a:r>
+            <a:r>
+              <a:rPr sz="1800" dirty="0">
+                <a:solidFill>
+                  <a:srgbClr val="23232B"/>
+                </a:solidFill>
+                <a:latin typeface="Segoe UI"/>
+              </a:rPr>
+              <a:t> </a:t>
+            </a:r>
+            <a:r>
+              <a:rPr sz="1800" dirty="0" err="1">
+                <a:solidFill>
+                  <a:srgbClr val="23232B"/>
+                </a:solidFill>
+                <a:latin typeface="Segoe UI"/>
+              </a:rPr>
+              <a:t>belgilar</a:t>
+            </a:r>
+            <a:r>
+              <a:rPr sz="1800" dirty="0">
+                <a:solidFill>
+                  <a:srgbClr val="23232B"/>
+                </a:solidFill>
+                <a:latin typeface="Segoe UI"/>
+              </a:rPr>
+              <a:t> </a:t>
+            </a:r>
+            <a:r>
+              <a:rPr sz="1800" dirty="0" err="1">
+                <a:solidFill>
+                  <a:srgbClr val="23232B"/>
+                </a:solidFill>
+                <a:latin typeface="Segoe UI"/>
+              </a:rPr>
+              <a:t>identifikator</a:t>
+            </a:r>
+            <a:r>
+              <a:rPr sz="1800" dirty="0">
+                <a:solidFill>
+                  <a:srgbClr val="23232B"/>
+                </a:solidFill>
+                <a:latin typeface="Segoe UI"/>
+              </a:rPr>
+              <a:t> (nom) </a:t>
+            </a:r>
+            <a:r>
+              <a:rPr sz="1800" dirty="0" err="1">
+                <a:solidFill>
+                  <a:srgbClr val="23232B"/>
+                </a:solidFill>
+                <a:latin typeface="Segoe UI"/>
+              </a:rPr>
+              <a:t>ichida</a:t>
+            </a:r>
+            <a:r>
+              <a:rPr sz="1800" dirty="0">
+                <a:solidFill>
+                  <a:srgbClr val="23232B"/>
+                </a:solidFill>
+                <a:latin typeface="Segoe UI"/>
+              </a:rPr>
+              <a:t> </a:t>
+            </a:r>
+            <a:r>
+              <a:rPr sz="1800" dirty="0" err="1">
+                <a:solidFill>
+                  <a:srgbClr val="23232B"/>
+                </a:solidFill>
+                <a:latin typeface="Segoe UI"/>
+              </a:rPr>
+              <a:t>ishlatilmaydi</a:t>
+            </a:r>
+            <a:r>
+              <a:rPr sz="1800" dirty="0">
+                <a:solidFill>
+                  <a:srgbClr val="23232B"/>
+                </a:solidFill>
+                <a:latin typeface="Segoe UI"/>
+              </a:rPr>
+              <a:t> — </a:t>
+            </a:r>
+            <a:r>
+              <a:rPr sz="1800" dirty="0" err="1">
+                <a:solidFill>
+                  <a:srgbClr val="23232B"/>
+                </a:solidFill>
+                <a:latin typeface="Segoe UI"/>
+              </a:rPr>
+              <a:t>buni</a:t>
+            </a:r>
+            <a:r>
+              <a:rPr sz="1800" dirty="0">
+                <a:solidFill>
+                  <a:srgbClr val="23232B"/>
+                </a:solidFill>
+                <a:latin typeface="Segoe UI"/>
+              </a:rPr>
+              <a:t> </a:t>
+            </a:r>
+            <a:r>
+              <a:rPr sz="1800" dirty="0" err="1">
+                <a:solidFill>
+                  <a:srgbClr val="23232B"/>
+                </a:solidFill>
+                <a:latin typeface="Segoe UI"/>
+              </a:rPr>
+              <a:t>keyingi</a:t>
+            </a:r>
+            <a:r>
+              <a:rPr sz="1800" dirty="0">
+                <a:solidFill>
+                  <a:srgbClr val="23232B"/>
+                </a:solidFill>
+                <a:latin typeface="Segoe UI"/>
+              </a:rPr>
+              <a:t> </a:t>
+            </a:r>
+            <a:r>
+              <a:rPr sz="1800" dirty="0" err="1">
+                <a:solidFill>
+                  <a:srgbClr val="23232B"/>
+                </a:solidFill>
+                <a:latin typeface="Segoe UI"/>
+              </a:rPr>
+              <a:t>slaydda</a:t>
+            </a:r>
+            <a:r>
+              <a:rPr sz="1800" dirty="0">
+                <a:solidFill>
+                  <a:srgbClr val="23232B"/>
+                </a:solidFill>
+                <a:latin typeface="Segoe UI"/>
+              </a:rPr>
+              <a:t> </a:t>
+            </a:r>
+            <a:r>
+              <a:rPr sz="1800" dirty="0" err="1">
+                <a:solidFill>
+                  <a:srgbClr val="23232B"/>
+                </a:solidFill>
+                <a:latin typeface="Segoe UI"/>
+              </a:rPr>
+              <a:t>ko'ramiz</a:t>
+            </a:r>
+            <a:r>
+              <a:rPr sz="1800" dirty="0">
+                <a:solidFill>
+                  <a:srgbClr val="23232B"/>
+                </a:solidFill>
+                <a:latin typeface="Segoe UI"/>
+              </a:rPr>
+              <a:t>.</a:t>
             </a:r>
           </a:p>
         </p:txBody>
